--- a/deck/disha-idea-deck-draft.pptx
+++ b/deck/disha-idea-deck-draft.pptx
@@ -15,8 +15,8 @@
   <p:notesMasterIdLst>
     <p:notesMasterId r:id="rId8"/>
   </p:notesMasterIdLst>
-  <p:sldSz cx="12192000" cy="6858000"/>
-  <p:notesSz cx="6858000" cy="12192000"/>
+  <p:sldSz cx="9144000" cy="5143500"/>
+  <p:notesSz cx="5143500" cy="9144000"/>
   <p:defaultTextStyle>
     <a:lvl1pPr marL="0" algn="l" defTabSz="914400" rtl="0" eaLnBrk="1" latinLnBrk="0" hangingPunct="1">
       <a:defRPr sz="1800" kern="1200">
@@ -508,7 +508,7 @@
             <a:r>
               <a:rPr lang="en-US" dirty="0"/>
               <a:t>Opening line: Only 21% of rural Indians aged 15-24 can search online, use email and bank online (MoSPI CAMS 2022-23). The services exist. People fail at the interface.
-FILL IN the team ID and team name before this deck is submitted.</a:t>
+Team ID stays blank until the intercollege SIH round is cleared.</a:t>
             </a:r>
             <a:endParaRPr lang="en-US" dirty="0"/>
           </a:p>
@@ -596,8 +596,8 @@
           <a:p>
             <a:r>
               <a:rPr lang="en-US" dirty="0"/>
-              <a:t>The image is a real run of the prototype, not a mock-up: the red dot sits on the amount field and the panel shows all four steps - 64%, 57%, 51% red, 75%.
-One sentence for how it addresses the problem: a citizen who does not know the word 'withdraw' still finishes the task, and finishes it themselves.</a:t>
+              <a:t>The screenshot is a real run, not a mock-up: red dot on the amount field, and the panel shows all four steps - 64%, 57%, 51% red, 75%.
+Slide 2 is the only slide whose title we choose - 'IDEA TITLE' is a placeholder for the idea's name.</a:t>
             </a:r>
             <a:endParaRPr lang="en-US" dirty="0"/>
           </a:p>
@@ -775,7 +775,7 @@
           <a:p>
             <a:r>
               <a:rPr lang="en-US" dirty="0"/>
-              <a:t>If a judge pushes on the numbers, the honest answer is the red italic line: offline matcher, no model, capped below green by design, accuracy unmeasured.</a:t>
+              <a:t>If a judge pushes on the numbers, the honest answer is the red line: offline matcher, no model, capped below green by design, accuracy unmeasured.</a:t>
             </a:r>
             <a:endParaRPr lang="en-US" dirty="0"/>
           </a:p>
@@ -863,10 +863,8 @@
           <a:p>
             <a:r>
               <a:rPr lang="en-US" dirty="0"/>
-              <a:t>Supporting lines, not on the slide:
-- Only 11.4% of connected households use the internet for government services; one in five households using digital services depends on help from outside the household (NCAER, June 2026).
-- A Maharashtra study recorded Rs 47 in service charges plus travel; a Jharkhand study recorded Rs 101 actually paid against a Rs 30 official fee. Say 'a study recorded', never 'Indians pay'.
-- 57% of urban internet users preferred Indic-language content in 2024 (IAMAI-Kantar).</a:t>
+              <a:t>Say 'a Maharashtra study recorded Rs 47', never 'Indians pay Rs 47' - it is a local benchmark, not a national fee.
+57% of urban internet users preferred Indic-language content in 2024 (IAMAI-Kantar) - guidance can be spoken in the mother tongue through BHASHINI.</a:t>
             </a:r>
             <a:endParaRPr lang="en-US" dirty="0"/>
           </a:p>
@@ -954,7 +952,7 @@
           <a:p>
             <a:r>
               <a:rPr lang="en-US" dirty="0"/>
-              <a:t/>
+              <a:t>Both winner decks put clickable links here and on slides 2-3 (Video, Website, Report, GitHub). We have nothing public to link yet - no git remote, demo on localhost, explainer is a private artifact. Fix that before submitting, or carry the prototype open in a tab instead.</a:t>
             </a:r>
             <a:endParaRPr lang="en-US" dirty="0"/>
           </a:p>
@@ -1322,42 +1320,28 @@
       </p:grpSpPr>
       <p:sp>
         <p:nvSpPr>
-          <p:cNvPr id="2" name="Text 0"/>
-          <p:cNvSpPr txBox="1"/>
-          <p:nvPr/>
-        </p:nvSpPr>
-        <p:spPr>
-          <a:xfrm>
-            <a:off x="548640" y="320040"/>
-            <a:ext cx="11064240" cy="274320"/>
-          </a:xfrm>
-          <a:prstGeom prst="rect">
-            <a:avLst/>
-          </a:prstGeom>
-          <a:noFill/>
-          <a:ln/>
-        </p:spPr>
-        <p:txBody>
-          <a:bodyPr wrap="square" lIns="0" tIns="0" rIns="0" bIns="0" rtlCol="0" anchor="ctr"/>
-          <a:lstStyle/>
-          <a:p>
-            <a:pPr indent="0" marL="0">
-              <a:buNone/>
-            </a:pPr>
-            <a:r>
-              <a:rPr lang="en-US" sz="1200" b="1" spc="150" kern="0" dirty="0">
-                <a:solidFill>
-                  <a:srgbClr val="4B5563"/>
-                </a:solidFill>
-                <a:latin typeface="Calibri" pitchFamily="34" charset="0"/>
-                <a:ea typeface="Calibri" pitchFamily="34" charset="-122"/>
-                <a:cs typeface="Calibri" pitchFamily="34" charset="-120"/>
-              </a:rPr>
-              <a:t>SMART INDIA HACKATHON 2026</a:t>
-            </a:r>
-            <a:endParaRPr lang="en-US" sz="1200" dirty="0"/>
-          </a:p>
-        </p:txBody>
+          <p:cNvPr id="2" name="Shape 0"/>
+          <p:cNvSpPr/>
+          <p:nvPr/>
+        </p:nvSpPr>
+        <p:spPr>
+          <a:xfrm>
+            <a:off x="164592" y="109728"/>
+            <a:ext cx="1234440" cy="566928"/>
+          </a:xfrm>
+          <a:prstGeom prst="ellipse">
+            <a:avLst/>
+          </a:prstGeom>
+          <a:solidFill>
+            <a:srgbClr val="FFFFFF"/>
+          </a:solidFill>
+          <a:ln w="15875">
+            <a:solidFill>
+              <a:srgbClr val="7C6BAF"/>
+            </a:solidFill>
+            <a:prstDash val="solid"/>
+          </a:ln>
+        </p:spPr>
       </p:sp>
       <p:sp>
         <p:nvSpPr>
@@ -1367,8 +1351,8 @@
         </p:nvSpPr>
         <p:spPr>
           <a:xfrm>
-            <a:off x="548640" y="603504"/>
-            <a:ext cx="11064240" cy="777240"/>
+            <a:off x="164592" y="109728"/>
+            <a:ext cx="1234440" cy="566928"/>
           </a:xfrm>
           <a:prstGeom prst="rect">
             <a:avLst/>
@@ -1380,21 +1364,21 @@
           <a:bodyPr wrap="square" lIns="0" tIns="0" rIns="0" bIns="0" rtlCol="0" anchor="ctr"/>
           <a:lstStyle/>
           <a:p>
-            <a:pPr indent="0" marL="0">
-              <a:buNone/>
-            </a:pPr>
-            <a:r>
-              <a:rPr lang="en-US" sz="3200" b="1" dirty="0">
-                <a:solidFill>
-                  <a:srgbClr val="111827"/>
-                </a:solidFill>
-                <a:latin typeface="Calibri" pitchFamily="34" charset="0"/>
-                <a:ea typeface="Calibri" pitchFamily="34" charset="-122"/>
-                <a:cs typeface="Calibri" pitchFamily="34" charset="-120"/>
-              </a:rPr>
-              <a:t>Disha - guidance that teaches you to stop needing it</a:t>
-            </a:r>
-            <a:endParaRPr lang="en-US" sz="3200" dirty="0"/>
+            <a:pPr algn="ctr" indent="0" marL="0">
+              <a:buNone/>
+            </a:pPr>
+            <a:r>
+              <a:rPr lang="en-US" sz="1100" dirty="0">
+                <a:solidFill>
+                  <a:srgbClr val="1A1A1A"/>
+                </a:solidFill>
+                <a:latin typeface="Calibri" pitchFamily="34" charset="0"/>
+                <a:ea typeface="Calibri" pitchFamily="34" charset="-122"/>
+                <a:cs typeface="Calibri" pitchFamily="34" charset="-120"/>
+              </a:rPr>
+              <a:t>Code Blooded</a:t>
+            </a:r>
+            <a:endParaRPr lang="en-US" sz="1100" dirty="0"/>
           </a:p>
         </p:txBody>
       </p:sp>
@@ -1406,8 +1390,8 @@
         </p:nvSpPr>
         <p:spPr>
           <a:xfrm>
-            <a:off x="548640" y="1600200"/>
-            <a:ext cx="5577840" cy="4206240"/>
+            <a:off x="1463040" y="128016"/>
+            <a:ext cx="6126480" cy="530352"/>
           </a:xfrm>
           <a:prstGeom prst="rect">
             <a:avLst/>
@@ -1416,157 +1400,464 @@
           <a:ln/>
         </p:spPr>
         <p:txBody>
+          <a:bodyPr wrap="square" lIns="0" tIns="0" rIns="0" bIns="0" rtlCol="0" anchor="ctr"/>
+          <a:lstStyle/>
+          <a:p>
+            <a:pPr algn="ctr" indent="0" marL="0">
+              <a:buNone/>
+            </a:pPr>
+            <a:r>
+              <a:rPr lang="en-US" sz="2600" b="1" dirty="0">
+                <a:solidFill>
+                  <a:srgbClr val="1F3864"/>
+                </a:solidFill>
+                <a:latin typeface="Cambria" pitchFamily="34" charset="0"/>
+                <a:ea typeface="Cambria" pitchFamily="34" charset="-122"/>
+                <a:cs typeface="Cambria" pitchFamily="34" charset="-120"/>
+              </a:rPr>
+              <a:t>TITLE PAGE</a:t>
+            </a:r>
+            <a:endParaRPr lang="en-US" sz="2600" dirty="0"/>
+          </a:p>
+        </p:txBody>
+      </p:sp>
+      <p:sp>
+        <p:nvSpPr>
+          <p:cNvPr id="5" name="Text 3"/>
+          <p:cNvSpPr txBox="1"/>
+          <p:nvPr/>
+        </p:nvSpPr>
+        <p:spPr>
+          <a:xfrm>
+            <a:off x="7699248" y="128016"/>
+            <a:ext cx="1316736" cy="548640"/>
+          </a:xfrm>
+          <a:prstGeom prst="rect">
+            <a:avLst/>
+          </a:prstGeom>
+          <a:noFill/>
+          <a:ln w="9525">
+            <a:solidFill>
+              <a:srgbClr val="DDDDDD"/>
+            </a:solidFill>
+            <a:prstDash val="dash"/>
+          </a:ln>
+        </p:spPr>
+        <p:txBody>
+          <a:bodyPr wrap="square" lIns="0" tIns="0" rIns="0" bIns="0" rtlCol="0" anchor="ctr"/>
+          <a:lstStyle/>
+          <a:p>
+            <a:pPr algn="ctr" indent="0" marL="0">
+              <a:buNone/>
+            </a:pPr>
+            <a:r>
+              <a:rPr lang="en-US" sz="750" i="1" dirty="0">
+                <a:solidFill>
+                  <a:srgbClr val="AAAAAA"/>
+                </a:solidFill>
+                <a:latin typeface="Calibri" pitchFamily="34" charset="0"/>
+                <a:ea typeface="Calibri" pitchFamily="34" charset="-122"/>
+                <a:cs typeface="Calibri" pitchFamily="34" charset="-120"/>
+              </a:rPr>
+              <a:t>SIH 2026 logo</a:t>
+            </a:r>
+            <a:endParaRPr lang="en-US" sz="750" dirty="0"/>
+          </a:p>
+          <a:p>
+            <a:pPr algn="ctr" indent="0" marL="0">
+              <a:buNone/>
+            </a:pPr>
+            <a:r>
+              <a:rPr lang="en-US" sz="750" i="1" dirty="0">
+                <a:solidFill>
+                  <a:srgbClr val="AAAAAA"/>
+                </a:solidFill>
+                <a:latin typeface="Calibri" pitchFamily="34" charset="0"/>
+                <a:ea typeface="Calibri" pitchFamily="34" charset="-122"/>
+                <a:cs typeface="Calibri" pitchFamily="34" charset="-120"/>
+              </a:rPr>
+              <a:t>(from the official template)</a:t>
+            </a:r>
+            <a:endParaRPr lang="en-US" sz="750" dirty="0"/>
+          </a:p>
+        </p:txBody>
+      </p:sp>
+      <p:sp>
+        <p:nvSpPr>
+          <p:cNvPr id="6" name="Shape 4"/>
+          <p:cNvSpPr/>
+          <p:nvPr/>
+        </p:nvSpPr>
+        <p:spPr>
+          <a:xfrm>
+            <a:off x="0" y="4832604"/>
+            <a:ext cx="9144000" cy="310896"/>
+          </a:xfrm>
+          <a:prstGeom prst="rect">
+            <a:avLst/>
+          </a:prstGeom>
+          <a:solidFill>
+            <a:srgbClr val="1F7AC4"/>
+          </a:solidFill>
+          <a:ln/>
+        </p:spPr>
+      </p:sp>
+      <p:sp>
+        <p:nvSpPr>
+          <p:cNvPr id="7" name="Text 5"/>
+          <p:cNvSpPr txBox="1"/>
+          <p:nvPr/>
+        </p:nvSpPr>
+        <p:spPr>
+          <a:xfrm>
+            <a:off x="0" y="4832604"/>
+            <a:ext cx="9144000" cy="310896"/>
+          </a:xfrm>
+          <a:prstGeom prst="rect">
+            <a:avLst/>
+          </a:prstGeom>
+          <a:noFill/>
+          <a:ln/>
+        </p:spPr>
+        <p:txBody>
+          <a:bodyPr wrap="square" lIns="0" tIns="0" rIns="0" bIns="0" rtlCol="0" anchor="ctr"/>
+          <a:lstStyle/>
+          <a:p>
+            <a:pPr algn="ctr" indent="0" marL="0">
+              <a:buNone/>
+            </a:pPr>
+            <a:r>
+              <a:rPr lang="en-US" sz="1000" dirty="0">
+                <a:solidFill>
+                  <a:srgbClr val="FFFFFF"/>
+                </a:solidFill>
+                <a:latin typeface="Calibri" pitchFamily="34" charset="0"/>
+                <a:ea typeface="Calibri" pitchFamily="34" charset="-122"/>
+                <a:cs typeface="Calibri" pitchFamily="34" charset="-120"/>
+              </a:rPr>
+              <a:t>@SIH Idea submission- Template</a:t>
+            </a:r>
+            <a:endParaRPr lang="en-US" sz="1000" dirty="0"/>
+          </a:p>
+        </p:txBody>
+      </p:sp>
+      <p:sp>
+        <p:nvSpPr>
+          <p:cNvPr id="8" name="Text 6"/>
+          <p:cNvSpPr txBox="1"/>
+          <p:nvPr/>
+        </p:nvSpPr>
+        <p:spPr>
+          <a:xfrm>
+            <a:off x="8595360" y="4832604"/>
+            <a:ext cx="365760" cy="310896"/>
+          </a:xfrm>
+          <a:prstGeom prst="rect">
+            <a:avLst/>
+          </a:prstGeom>
+          <a:noFill/>
+          <a:ln/>
+        </p:spPr>
+        <p:txBody>
+          <a:bodyPr wrap="square" lIns="0" tIns="0" rIns="0" bIns="0" rtlCol="0" anchor="ctr"/>
+          <a:lstStyle/>
+          <a:p>
+            <a:pPr algn="r" indent="0" marL="0">
+              <a:buNone/>
+            </a:pPr>
+            <a:r>
+              <a:rPr lang="en-US" sz="1000" b="1" dirty="0">
+                <a:solidFill>
+                  <a:srgbClr val="FFFFFF"/>
+                </a:solidFill>
+                <a:latin typeface="Calibri" pitchFamily="34" charset="0"/>
+                <a:ea typeface="Calibri" pitchFamily="34" charset="-122"/>
+                <a:cs typeface="Calibri" pitchFamily="34" charset="-120"/>
+              </a:rPr>
+              <a:t>1</a:t>
+            </a:r>
+            <a:endParaRPr lang="en-US" sz="1000" dirty="0"/>
+          </a:p>
+        </p:txBody>
+      </p:sp>
+      <p:sp>
+        <p:nvSpPr>
+          <p:cNvPr id="9" name="Text 7"/>
+          <p:cNvSpPr txBox="1"/>
+          <p:nvPr/>
+        </p:nvSpPr>
+        <p:spPr>
+          <a:xfrm>
+            <a:off x="502920" y="1051560"/>
+            <a:ext cx="5029200" cy="3291840"/>
+          </a:xfrm>
+          <a:prstGeom prst="rect">
+            <a:avLst/>
+          </a:prstGeom>
+          <a:noFill/>
+          <a:ln/>
+        </p:spPr>
+        <p:txBody>
           <a:bodyPr wrap="square" lIns="0" tIns="0" rIns="0" bIns="0" rtlCol="0" anchor="t"/>
           <a:lstStyle/>
           <a:p>
             <a:pPr marL="342900" indent="-342900">
               <a:lnSpc>
-                <a:spcPts val="2200"/>
-              </a:lnSpc>
-              <a:spcAft>
-                <a:spcPts val="1000"/>
-              </a:spcAft>
+                <a:spcPts val="3000"/>
+              </a:lnSpc>
               <a:buSzPct val="100000"/>
               <a:buChar char="•"/>
             </a:pPr>
             <a:r>
-              <a:rPr lang="en-US" sz="1500" dirty="0">
-                <a:solidFill>
-                  <a:srgbClr val="111827"/>
-                </a:solidFill>
-                <a:latin typeface="Calibri" pitchFamily="34" charset="0"/>
-                <a:ea typeface="Calibri" pitchFamily="34" charset="-122"/>
-                <a:cs typeface="Calibri" pitchFamily="34" charset="-120"/>
-              </a:rPr>
-              <a:t>Problem Statement ID: 26207</a:t>
-            </a:r>
-            <a:endParaRPr lang="en-US" sz="1500" dirty="0"/>
-          </a:p>
-          <a:p>
-            <a:pPr marL="342900" indent="-342900">
-              <a:lnSpc>
-                <a:spcPts val="2200"/>
-              </a:lnSpc>
-              <a:spcAft>
-                <a:spcPts val="1000"/>
-              </a:spcAft>
-              <a:buSzPct val="100000"/>
-              <a:buChar char="•"/>
-            </a:pPr>
-            <a:r>
-              <a:rPr lang="en-US" sz="1500" dirty="0">
-                <a:solidFill>
-                  <a:srgbClr val="111827"/>
-                </a:solidFill>
-                <a:latin typeface="Calibri" pitchFamily="34" charset="0"/>
-                <a:ea typeface="Calibri" pitchFamily="34" charset="-122"/>
-                <a:cs typeface="Calibri" pitchFamily="34" charset="-120"/>
-              </a:rPr>
-              <a:t>Problem Statement Title: Student Innovation - bring-your-own idea</a:t>
-            </a:r>
-            <a:endParaRPr lang="en-US" sz="1500" dirty="0"/>
-          </a:p>
-          <a:p>
-            <a:pPr marL="342900" indent="-342900">
-              <a:lnSpc>
-                <a:spcPts val="2200"/>
-              </a:lnSpc>
-              <a:spcAft>
-                <a:spcPts val="1000"/>
-              </a:spcAft>
-              <a:buSzPct val="100000"/>
-              <a:buChar char="•"/>
-            </a:pPr>
-            <a:r>
-              <a:rPr lang="en-US" sz="1500" dirty="0">
-                <a:solidFill>
-                  <a:srgbClr val="111827"/>
-                </a:solidFill>
-                <a:latin typeface="Calibri" pitchFamily="34" charset="0"/>
-                <a:ea typeface="Calibri" pitchFamily="34" charset="-122"/>
-                <a:cs typeface="Calibri" pitchFamily="34" charset="-120"/>
-              </a:rPr>
-              <a:t>Theme: Smart Education</a:t>
-            </a:r>
-            <a:endParaRPr lang="en-US" sz="1500" dirty="0"/>
-          </a:p>
-          <a:p>
-            <a:pPr marL="342900" indent="-342900">
-              <a:lnSpc>
-                <a:spcPts val="2200"/>
-              </a:lnSpc>
-              <a:spcAft>
-                <a:spcPts val="1000"/>
-              </a:spcAft>
-              <a:buSzPct val="100000"/>
-              <a:buChar char="•"/>
-            </a:pPr>
-            <a:r>
-              <a:rPr lang="en-US" sz="1500" dirty="0">
-                <a:solidFill>
-                  <a:srgbClr val="111827"/>
-                </a:solidFill>
-                <a:latin typeface="Calibri" pitchFamily="34" charset="0"/>
-                <a:ea typeface="Calibri" pitchFamily="34" charset="-122"/>
-                <a:cs typeface="Calibri" pitchFamily="34" charset="-120"/>
-              </a:rPr>
-              <a:t>PS Category: Software</a:t>
-            </a:r>
-            <a:endParaRPr lang="en-US" sz="1500" dirty="0"/>
-          </a:p>
-          <a:p>
-            <a:pPr marL="342900" indent="-342900">
-              <a:lnSpc>
-                <a:spcPts val="2200"/>
-              </a:lnSpc>
-              <a:spcAft>
-                <a:spcPts val="1000"/>
-              </a:spcAft>
-              <a:buSzPct val="100000"/>
-              <a:buChar char="•"/>
-            </a:pPr>
-            <a:r>
-              <a:rPr lang="en-US" sz="1500" dirty="0">
-                <a:solidFill>
-                  <a:srgbClr val="111827"/>
-                </a:solidFill>
-                <a:latin typeface="Calibri" pitchFamily="34" charset="0"/>
-                <a:ea typeface="Calibri" pitchFamily="34" charset="-122"/>
-                <a:cs typeface="Calibri" pitchFamily="34" charset="-120"/>
-              </a:rPr>
-              <a:t>Team ID: &lt;TEAM ID&gt;</a:t>
-            </a:r>
-            <a:endParaRPr lang="en-US" sz="1500" dirty="0"/>
-          </a:p>
-          <a:p>
-            <a:pPr marL="342900" indent="-342900">
-              <a:lnSpc>
-                <a:spcPts val="2200"/>
-              </a:lnSpc>
-              <a:spcAft>
-                <a:spcPts val="1000"/>
-              </a:spcAft>
-              <a:buSzPct val="100000"/>
-              <a:buChar char="•"/>
-            </a:pPr>
-            <a:r>
-              <a:rPr lang="en-US" sz="1500" dirty="0">
-                <a:solidFill>
-                  <a:srgbClr val="111827"/>
-                </a:solidFill>
-                <a:latin typeface="Calibri" pitchFamily="34" charset="0"/>
-                <a:ea typeface="Calibri" pitchFamily="34" charset="-122"/>
-                <a:cs typeface="Calibri" pitchFamily="34" charset="-120"/>
-              </a:rPr>
-              <a:t>Team Name: &lt;TEAM NAME&gt;</a:t>
-            </a:r>
-            <a:endParaRPr lang="en-US" sz="1500" dirty="0"/>
+              <a:rPr lang="en-US" sz="1300" b="1" dirty="0">
+                <a:solidFill>
+                  <a:srgbClr val="1A1A1A"/>
+                </a:solidFill>
+                <a:latin typeface="Calibri" pitchFamily="34" charset="0"/>
+                <a:ea typeface="Calibri" pitchFamily="34" charset="-122"/>
+                <a:cs typeface="Calibri" pitchFamily="34" charset="-120"/>
+              </a:rPr>
+              <a:t>Problem Statement ID - </a:t>
+            </a:r>
+            <a:pPr indent="0" marL="0">
+              <a:lnSpc>
+                <a:spcPts val="3000"/>
+              </a:lnSpc>
+              <a:buNone/>
+            </a:pPr>
+            <a:r>
+              <a:rPr lang="en-US" sz="1300" dirty="0">
+                <a:solidFill>
+                  <a:srgbClr val="1A1A1A"/>
+                </a:solidFill>
+                <a:latin typeface="Calibri" pitchFamily="34" charset="0"/>
+                <a:ea typeface="Calibri" pitchFamily="34" charset="-122"/>
+                <a:cs typeface="Calibri" pitchFamily="34" charset="-120"/>
+              </a:rPr>
+              <a:t>26207</a:t>
+            </a:r>
+            <a:pPr indent="0" marL="0">
+              <a:lnSpc>
+                <a:spcPts val="3000"/>
+              </a:lnSpc>
+              <a:buNone/>
+            </a:pPr>
+            <a:endParaRPr lang="en-US" sz="1300" dirty="0"/>
+          </a:p>
+          <a:p>
+            <a:pPr indent="0" marL="0">
+              <a:lnSpc>
+                <a:spcPts val="3000"/>
+              </a:lnSpc>
+              <a:buNone/>
+            </a:pPr>
+            <a:r>
+              <a:rPr lang="en-US" sz="1300" b="1" dirty="0">
+                <a:solidFill>
+                  <a:srgbClr val="1A1A1A"/>
+                </a:solidFill>
+                <a:latin typeface="Calibri" pitchFamily="34" charset="0"/>
+                <a:ea typeface="Calibri" pitchFamily="34" charset="-122"/>
+                <a:cs typeface="Calibri" pitchFamily="34" charset="-120"/>
+              </a:rPr>
+              <a:t>Problem Statement Title - </a:t>
+            </a:r>
+            <a:pPr indent="0" marL="0">
+              <a:lnSpc>
+                <a:spcPts val="3000"/>
+              </a:lnSpc>
+              <a:buNone/>
+            </a:pPr>
+            <a:r>
+              <a:rPr lang="en-US" sz="1300" dirty="0">
+                <a:solidFill>
+                  <a:srgbClr val="1A1A1A"/>
+                </a:solidFill>
+                <a:latin typeface="Calibri" pitchFamily="34" charset="0"/>
+                <a:ea typeface="Calibri" pitchFamily="34" charset="-122"/>
+                <a:cs typeface="Calibri" pitchFamily="34" charset="-120"/>
+              </a:rPr>
+              <a:t>Student Innovation (bring-your-own idea)</a:t>
+            </a:r>
+            <a:pPr indent="0" marL="0">
+              <a:lnSpc>
+                <a:spcPts val="3000"/>
+              </a:lnSpc>
+              <a:buNone/>
+            </a:pPr>
+            <a:endParaRPr lang="en-US" sz="1300" dirty="0"/>
+          </a:p>
+          <a:p>
+            <a:pPr indent="0" marL="0">
+              <a:lnSpc>
+                <a:spcPts val="3000"/>
+              </a:lnSpc>
+              <a:buNone/>
+            </a:pPr>
+            <a:r>
+              <a:rPr lang="en-US" sz="1300" b="1" dirty="0">
+                <a:solidFill>
+                  <a:srgbClr val="1A1A1A"/>
+                </a:solidFill>
+                <a:latin typeface="Calibri" pitchFamily="34" charset="0"/>
+                <a:ea typeface="Calibri" pitchFamily="34" charset="-122"/>
+                <a:cs typeface="Calibri" pitchFamily="34" charset="-120"/>
+              </a:rPr>
+              <a:t>Theme - </a:t>
+            </a:r>
+            <a:pPr indent="0" marL="0">
+              <a:lnSpc>
+                <a:spcPts val="3000"/>
+              </a:lnSpc>
+              <a:buNone/>
+            </a:pPr>
+            <a:r>
+              <a:rPr lang="en-US" sz="1300" dirty="0">
+                <a:solidFill>
+                  <a:srgbClr val="1A1A1A"/>
+                </a:solidFill>
+                <a:latin typeface="Calibri" pitchFamily="34" charset="0"/>
+                <a:ea typeface="Calibri" pitchFamily="34" charset="-122"/>
+                <a:cs typeface="Calibri" pitchFamily="34" charset="-120"/>
+              </a:rPr>
+              <a:t>Smart Education</a:t>
+            </a:r>
+            <a:pPr indent="0" marL="0">
+              <a:lnSpc>
+                <a:spcPts val="3000"/>
+              </a:lnSpc>
+              <a:buNone/>
+            </a:pPr>
+            <a:endParaRPr lang="en-US" sz="1300" dirty="0"/>
+          </a:p>
+          <a:p>
+            <a:pPr indent="0" marL="0">
+              <a:lnSpc>
+                <a:spcPts val="3000"/>
+              </a:lnSpc>
+              <a:buNone/>
+            </a:pPr>
+            <a:r>
+              <a:rPr lang="en-US" sz="1300" b="1" dirty="0">
+                <a:solidFill>
+                  <a:srgbClr val="1A1A1A"/>
+                </a:solidFill>
+                <a:latin typeface="Calibri" pitchFamily="34" charset="0"/>
+                <a:ea typeface="Calibri" pitchFamily="34" charset="-122"/>
+                <a:cs typeface="Calibri" pitchFamily="34" charset="-120"/>
+              </a:rPr>
+              <a:t>PS Category - </a:t>
+            </a:r>
+            <a:pPr indent="0" marL="0">
+              <a:lnSpc>
+                <a:spcPts val="3000"/>
+              </a:lnSpc>
+              <a:buNone/>
+            </a:pPr>
+            <a:r>
+              <a:rPr lang="en-US" sz="1300" dirty="0">
+                <a:solidFill>
+                  <a:srgbClr val="1A1A1A"/>
+                </a:solidFill>
+                <a:latin typeface="Calibri" pitchFamily="34" charset="0"/>
+                <a:ea typeface="Calibri" pitchFamily="34" charset="-122"/>
+                <a:cs typeface="Calibri" pitchFamily="34" charset="-120"/>
+              </a:rPr>
+              <a:t>Software</a:t>
+            </a:r>
+            <a:pPr indent="0" marL="0">
+              <a:lnSpc>
+                <a:spcPts val="3000"/>
+              </a:lnSpc>
+              <a:buNone/>
+            </a:pPr>
+            <a:endParaRPr lang="en-US" sz="1300" dirty="0"/>
+          </a:p>
+          <a:p>
+            <a:pPr indent="0" marL="0">
+              <a:lnSpc>
+                <a:spcPts val="3000"/>
+              </a:lnSpc>
+              <a:buNone/>
+            </a:pPr>
+            <a:r>
+              <a:rPr lang="en-US" sz="1300" b="1" dirty="0">
+                <a:solidFill>
+                  <a:srgbClr val="1A1A1A"/>
+                </a:solidFill>
+                <a:latin typeface="Calibri" pitchFamily="34" charset="0"/>
+                <a:ea typeface="Calibri" pitchFamily="34" charset="-122"/>
+                <a:cs typeface="Calibri" pitchFamily="34" charset="-120"/>
+              </a:rPr>
+              <a:t>Team ID - </a:t>
+            </a:r>
+            <a:pPr indent="0" marL="0">
+              <a:lnSpc>
+                <a:spcPts val="3000"/>
+              </a:lnSpc>
+              <a:buNone/>
+            </a:pPr>
+            <a:r>
+              <a:rPr lang="en-US" sz="1300" i="1" dirty="0">
+                <a:solidFill>
+                  <a:srgbClr val="595959"/>
+                </a:solidFill>
+                <a:latin typeface="Calibri" pitchFamily="34" charset="0"/>
+                <a:ea typeface="Calibri" pitchFamily="34" charset="-122"/>
+                <a:cs typeface="Calibri" pitchFamily="34" charset="-120"/>
+              </a:rPr>
+              <a:t>issued after the intercollege round</a:t>
+            </a:r>
+            <a:pPr indent="0" marL="0">
+              <a:lnSpc>
+                <a:spcPts val="3000"/>
+              </a:lnSpc>
+              <a:buNone/>
+            </a:pPr>
+            <a:endParaRPr lang="en-US" sz="1300" dirty="0"/>
+          </a:p>
+          <a:p>
+            <a:pPr indent="0" marL="0">
+              <a:lnSpc>
+                <a:spcPts val="3000"/>
+              </a:lnSpc>
+              <a:buNone/>
+            </a:pPr>
+            <a:r>
+              <a:rPr lang="en-US" sz="1300" b="1" dirty="0">
+                <a:solidFill>
+                  <a:srgbClr val="1A1A1A"/>
+                </a:solidFill>
+                <a:latin typeface="Calibri" pitchFamily="34" charset="0"/>
+                <a:ea typeface="Calibri" pitchFamily="34" charset="-122"/>
+                <a:cs typeface="Calibri" pitchFamily="34" charset="-120"/>
+              </a:rPr>
+              <a:t>Team Name - </a:t>
+            </a:r>
+            <a:pPr indent="0" marL="0">
+              <a:lnSpc>
+                <a:spcPts val="3000"/>
+              </a:lnSpc>
+              <a:buNone/>
+            </a:pPr>
+            <a:r>
+              <a:rPr lang="en-US" sz="1300" dirty="0">
+                <a:solidFill>
+                  <a:srgbClr val="1A1A1A"/>
+                </a:solidFill>
+                <a:latin typeface="Calibri" pitchFamily="34" charset="0"/>
+                <a:ea typeface="Calibri" pitchFamily="34" charset="-122"/>
+                <a:cs typeface="Calibri" pitchFamily="34" charset="-120"/>
+              </a:rPr>
+              <a:t>Code Blooded</a:t>
+            </a:r>
+            <a:endParaRPr lang="en-US" sz="1300" dirty="0"/>
           </a:p>
         </p:txBody>
       </p:sp>
       <p:pic>
         <p:nvPicPr>
-          <p:cNvPr id="5" name="Image 0" descr="F:\SIH\deck\assets\portal-home.png">    </p:cNvPr>
+          <p:cNvPr id="10" name="Image 0" descr="F:\SIH\deck\assets\portal-home.png">    </p:cNvPr>
           <p:cNvPicPr>
             <a:picLocks noChangeAspect="1"/>
           </p:cNvPicPr>
@@ -1580,8 +1871,8 @@
         </p:blipFill>
         <p:spPr>
           <a:xfrm>
-            <a:off x="6309360" y="1600200"/>
-            <a:ext cx="5486400" cy="3086100"/>
+            <a:off x="5623560" y="1371600"/>
+            <a:ext cx="3108960" cy="1748790"/>
           </a:xfrm>
           <a:prstGeom prst="rect">
             <a:avLst/>
@@ -1615,42 +1906,28 @@
       </p:grpSpPr>
       <p:sp>
         <p:nvSpPr>
-          <p:cNvPr id="2" name="Text 0"/>
-          <p:cNvSpPr txBox="1"/>
-          <p:nvPr/>
-        </p:nvSpPr>
-        <p:spPr>
-          <a:xfrm>
-            <a:off x="548640" y="320040"/>
-            <a:ext cx="11064240" cy="274320"/>
-          </a:xfrm>
-          <a:prstGeom prst="rect">
-            <a:avLst/>
-          </a:prstGeom>
-          <a:noFill/>
-          <a:ln/>
-        </p:spPr>
-        <p:txBody>
-          <a:bodyPr wrap="square" lIns="0" tIns="0" rIns="0" bIns="0" rtlCol="0" anchor="ctr"/>
-          <a:lstStyle/>
-          <a:p>
-            <a:pPr indent="0" marL="0">
-              <a:buNone/>
-            </a:pPr>
-            <a:r>
-              <a:rPr lang="en-US" sz="1200" b="1" spc="150" kern="0" dirty="0">
-                <a:solidFill>
-                  <a:srgbClr val="4B5563"/>
-                </a:solidFill>
-                <a:latin typeface="Calibri" pitchFamily="34" charset="0"/>
-                <a:ea typeface="Calibri" pitchFamily="34" charset="-122"/>
-                <a:cs typeface="Calibri" pitchFamily="34" charset="-120"/>
-              </a:rPr>
-              <a:t>IDEA TITLE AND PROPOSED SOLUTION</a:t>
-            </a:r>
-            <a:endParaRPr lang="en-US" sz="1200" dirty="0"/>
-          </a:p>
-        </p:txBody>
+          <p:cNvPr id="2" name="Shape 0"/>
+          <p:cNvSpPr/>
+          <p:nvPr/>
+        </p:nvSpPr>
+        <p:spPr>
+          <a:xfrm>
+            <a:off x="164592" y="109728"/>
+            <a:ext cx="1234440" cy="566928"/>
+          </a:xfrm>
+          <a:prstGeom prst="ellipse">
+            <a:avLst/>
+          </a:prstGeom>
+          <a:solidFill>
+            <a:srgbClr val="FFFFFF"/>
+          </a:solidFill>
+          <a:ln w="15875">
+            <a:solidFill>
+              <a:srgbClr val="7C6BAF"/>
+            </a:solidFill>
+            <a:prstDash val="solid"/>
+          </a:ln>
+        </p:spPr>
       </p:sp>
       <p:sp>
         <p:nvSpPr>
@@ -1660,8 +1937,8 @@
         </p:nvSpPr>
         <p:spPr>
           <a:xfrm>
-            <a:off x="548640" y="603504"/>
-            <a:ext cx="11064240" cy="777240"/>
+            <a:off x="164592" y="109728"/>
+            <a:ext cx="1234440" cy="566928"/>
           </a:xfrm>
           <a:prstGeom prst="rect">
             <a:avLst/>
@@ -1673,21 +1950,21 @@
           <a:bodyPr wrap="square" lIns="0" tIns="0" rIns="0" bIns="0" rtlCol="0" anchor="ctr"/>
           <a:lstStyle/>
           <a:p>
-            <a:pPr indent="0" marL="0">
-              <a:buNone/>
-            </a:pPr>
-            <a:r>
-              <a:rPr lang="en-US" sz="3200" b="1" dirty="0">
-                <a:solidFill>
-                  <a:srgbClr val="111827"/>
-                </a:solidFill>
-                <a:latin typeface="Calibri" pitchFamily="34" charset="0"/>
-                <a:ea typeface="Calibri" pitchFamily="34" charset="-122"/>
-                <a:cs typeface="Calibri" pitchFamily="34" charset="-120"/>
-              </a:rPr>
-              <a:t>It points. You click. Then it fades.</a:t>
-            </a:r>
-            <a:endParaRPr lang="en-US" sz="3200" dirty="0"/>
+            <a:pPr algn="ctr" indent="0" marL="0">
+              <a:buNone/>
+            </a:pPr>
+            <a:r>
+              <a:rPr lang="en-US" sz="1100" dirty="0">
+                <a:solidFill>
+                  <a:srgbClr val="1A1A1A"/>
+                </a:solidFill>
+                <a:latin typeface="Calibri" pitchFamily="34" charset="0"/>
+                <a:ea typeface="Calibri" pitchFamily="34" charset="-122"/>
+                <a:cs typeface="Calibri" pitchFamily="34" charset="-120"/>
+              </a:rPr>
+              <a:t>Code Blooded</a:t>
+            </a:r>
+            <a:endParaRPr lang="en-US" sz="1100" dirty="0"/>
           </a:p>
         </p:txBody>
       </p:sp>
@@ -1699,8 +1976,8 @@
         </p:nvSpPr>
         <p:spPr>
           <a:xfrm>
-            <a:off x="548640" y="1600200"/>
-            <a:ext cx="5577840" cy="2834640"/>
+            <a:off x="1463040" y="128016"/>
+            <a:ext cx="6126480" cy="530352"/>
           </a:xfrm>
           <a:prstGeom prst="rect">
             <a:avLst/>
@@ -1709,92 +1986,402 @@
           <a:ln/>
         </p:spPr>
         <p:txBody>
+          <a:bodyPr wrap="square" lIns="0" tIns="0" rIns="0" bIns="0" rtlCol="0" anchor="ctr"/>
+          <a:lstStyle/>
+          <a:p>
+            <a:pPr algn="ctr" indent="0" marL="0">
+              <a:buNone/>
+            </a:pPr>
+            <a:r>
+              <a:rPr lang="en-US" sz="1900" b="1" dirty="0">
+                <a:solidFill>
+                  <a:srgbClr val="1F3864"/>
+                </a:solidFill>
+                <a:latin typeface="Cambria" pitchFamily="34" charset="0"/>
+                <a:ea typeface="Cambria" pitchFamily="34" charset="-122"/>
+                <a:cs typeface="Cambria" pitchFamily="34" charset="-120"/>
+              </a:rPr>
+              <a:t>Disha - it points, you click, and then it fades</a:t>
+            </a:r>
+            <a:endParaRPr lang="en-US" sz="1900" dirty="0"/>
+          </a:p>
+        </p:txBody>
+      </p:sp>
+      <p:sp>
+        <p:nvSpPr>
+          <p:cNvPr id="5" name="Text 3"/>
+          <p:cNvSpPr txBox="1"/>
+          <p:nvPr/>
+        </p:nvSpPr>
+        <p:spPr>
+          <a:xfrm>
+            <a:off x="7699248" y="128016"/>
+            <a:ext cx="1316736" cy="548640"/>
+          </a:xfrm>
+          <a:prstGeom prst="rect">
+            <a:avLst/>
+          </a:prstGeom>
+          <a:noFill/>
+          <a:ln w="9525">
+            <a:solidFill>
+              <a:srgbClr val="DDDDDD"/>
+            </a:solidFill>
+            <a:prstDash val="dash"/>
+          </a:ln>
+        </p:spPr>
+        <p:txBody>
+          <a:bodyPr wrap="square" lIns="0" tIns="0" rIns="0" bIns="0" rtlCol="0" anchor="ctr"/>
+          <a:lstStyle/>
+          <a:p>
+            <a:pPr algn="ctr" indent="0" marL="0">
+              <a:buNone/>
+            </a:pPr>
+            <a:r>
+              <a:rPr lang="en-US" sz="750" i="1" dirty="0">
+                <a:solidFill>
+                  <a:srgbClr val="AAAAAA"/>
+                </a:solidFill>
+                <a:latin typeface="Calibri" pitchFamily="34" charset="0"/>
+                <a:ea typeface="Calibri" pitchFamily="34" charset="-122"/>
+                <a:cs typeface="Calibri" pitchFamily="34" charset="-120"/>
+              </a:rPr>
+              <a:t>SIH 2026 logo</a:t>
+            </a:r>
+            <a:endParaRPr lang="en-US" sz="750" dirty="0"/>
+          </a:p>
+          <a:p>
+            <a:pPr algn="ctr" indent="0" marL="0">
+              <a:buNone/>
+            </a:pPr>
+            <a:r>
+              <a:rPr lang="en-US" sz="750" i="1" dirty="0">
+                <a:solidFill>
+                  <a:srgbClr val="AAAAAA"/>
+                </a:solidFill>
+                <a:latin typeface="Calibri" pitchFamily="34" charset="0"/>
+                <a:ea typeface="Calibri" pitchFamily="34" charset="-122"/>
+                <a:cs typeface="Calibri" pitchFamily="34" charset="-120"/>
+              </a:rPr>
+              <a:t>(from the official template)</a:t>
+            </a:r>
+            <a:endParaRPr lang="en-US" sz="750" dirty="0"/>
+          </a:p>
+        </p:txBody>
+      </p:sp>
+      <p:sp>
+        <p:nvSpPr>
+          <p:cNvPr id="6" name="Shape 4"/>
+          <p:cNvSpPr/>
+          <p:nvPr/>
+        </p:nvSpPr>
+        <p:spPr>
+          <a:xfrm>
+            <a:off x="0" y="4832604"/>
+            <a:ext cx="9144000" cy="310896"/>
+          </a:xfrm>
+          <a:prstGeom prst="rect">
+            <a:avLst/>
+          </a:prstGeom>
+          <a:solidFill>
+            <a:srgbClr val="1F7AC4"/>
+          </a:solidFill>
+          <a:ln/>
+        </p:spPr>
+      </p:sp>
+      <p:sp>
+        <p:nvSpPr>
+          <p:cNvPr id="7" name="Text 5"/>
+          <p:cNvSpPr txBox="1"/>
+          <p:nvPr/>
+        </p:nvSpPr>
+        <p:spPr>
+          <a:xfrm>
+            <a:off x="0" y="4832604"/>
+            <a:ext cx="9144000" cy="310896"/>
+          </a:xfrm>
+          <a:prstGeom prst="rect">
+            <a:avLst/>
+          </a:prstGeom>
+          <a:noFill/>
+          <a:ln/>
+        </p:spPr>
+        <p:txBody>
+          <a:bodyPr wrap="square" lIns="0" tIns="0" rIns="0" bIns="0" rtlCol="0" anchor="ctr"/>
+          <a:lstStyle/>
+          <a:p>
+            <a:pPr algn="ctr" indent="0" marL="0">
+              <a:buNone/>
+            </a:pPr>
+            <a:r>
+              <a:rPr lang="en-US" sz="1000" dirty="0">
+                <a:solidFill>
+                  <a:srgbClr val="FFFFFF"/>
+                </a:solidFill>
+                <a:latin typeface="Calibri" pitchFamily="34" charset="0"/>
+                <a:ea typeface="Calibri" pitchFamily="34" charset="-122"/>
+                <a:cs typeface="Calibri" pitchFamily="34" charset="-120"/>
+              </a:rPr>
+              <a:t>@SIH Idea submission- Template</a:t>
+            </a:r>
+            <a:endParaRPr lang="en-US" sz="1000" dirty="0"/>
+          </a:p>
+        </p:txBody>
+      </p:sp>
+      <p:sp>
+        <p:nvSpPr>
+          <p:cNvPr id="8" name="Text 6"/>
+          <p:cNvSpPr txBox="1"/>
+          <p:nvPr/>
+        </p:nvSpPr>
+        <p:spPr>
+          <a:xfrm>
+            <a:off x="8595360" y="4832604"/>
+            <a:ext cx="365760" cy="310896"/>
+          </a:xfrm>
+          <a:prstGeom prst="rect">
+            <a:avLst/>
+          </a:prstGeom>
+          <a:noFill/>
+          <a:ln/>
+        </p:spPr>
+        <p:txBody>
+          <a:bodyPr wrap="square" lIns="0" tIns="0" rIns="0" bIns="0" rtlCol="0" anchor="ctr"/>
+          <a:lstStyle/>
+          <a:p>
+            <a:pPr algn="r" indent="0" marL="0">
+              <a:buNone/>
+            </a:pPr>
+            <a:r>
+              <a:rPr lang="en-US" sz="1000" b="1" dirty="0">
+                <a:solidFill>
+                  <a:srgbClr val="FFFFFF"/>
+                </a:solidFill>
+                <a:latin typeface="Calibri" pitchFamily="34" charset="0"/>
+                <a:ea typeface="Calibri" pitchFamily="34" charset="-122"/>
+                <a:cs typeface="Calibri" pitchFamily="34" charset="-120"/>
+              </a:rPr>
+              <a:t>2</a:t>
+            </a:r>
+            <a:endParaRPr lang="en-US" sz="1000" dirty="0"/>
+          </a:p>
+        </p:txBody>
+      </p:sp>
+      <p:sp>
+        <p:nvSpPr>
+          <p:cNvPr id="9" name="Shape 7"/>
+          <p:cNvSpPr/>
+          <p:nvPr/>
+        </p:nvSpPr>
+        <p:spPr>
+          <a:xfrm>
+            <a:off x="256032" y="804672"/>
+            <a:ext cx="4114800" cy="2487168"/>
+          </a:xfrm>
+          <a:prstGeom prst="rect">
+            <a:avLst/>
+          </a:prstGeom>
+          <a:solidFill>
+            <a:srgbClr val="FFFFFF"/>
+          </a:solidFill>
+          <a:ln w="12700">
+            <a:solidFill>
+              <a:srgbClr val="4A7EBB"/>
+            </a:solidFill>
+            <a:prstDash val="solid"/>
+          </a:ln>
+        </p:spPr>
+      </p:sp>
+      <p:sp>
+        <p:nvSpPr>
+          <p:cNvPr id="10" name="Text 8"/>
+          <p:cNvSpPr txBox="1"/>
+          <p:nvPr/>
+        </p:nvSpPr>
+        <p:spPr>
+          <a:xfrm>
+            <a:off x="365760" y="868680"/>
+            <a:ext cx="3895344" cy="237744"/>
+          </a:xfrm>
+          <a:prstGeom prst="rect">
+            <a:avLst/>
+          </a:prstGeom>
+          <a:noFill/>
+          <a:ln/>
+        </p:spPr>
+        <p:txBody>
+          <a:bodyPr wrap="square" lIns="0" tIns="0" rIns="0" bIns="0" rtlCol="0" anchor="ctr"/>
+          <a:lstStyle/>
+          <a:p>
+            <a:pPr indent="0" marL="0">
+              <a:buNone/>
+            </a:pPr>
+            <a:r>
+              <a:rPr lang="en-US" sz="1150" b="1" dirty="0">
+                <a:solidFill>
+                  <a:srgbClr val="2E74B5"/>
+                </a:solidFill>
+                <a:latin typeface="Calibri" pitchFamily="34" charset="0"/>
+                <a:ea typeface="Calibri" pitchFamily="34" charset="-122"/>
+                <a:cs typeface="Calibri" pitchFamily="34" charset="-120"/>
+              </a:rPr>
+              <a:t>IDEA / SOLUTION :</a:t>
+            </a:r>
+            <a:endParaRPr lang="en-US" sz="1150" dirty="0"/>
+          </a:p>
+        </p:txBody>
+      </p:sp>
+      <p:sp>
+        <p:nvSpPr>
+          <p:cNvPr id="11" name="Text 9"/>
+          <p:cNvSpPr txBox="1"/>
+          <p:nvPr/>
+        </p:nvSpPr>
+        <p:spPr>
+          <a:xfrm>
+            <a:off x="384048" y="1115568"/>
+            <a:ext cx="3858768" cy="2084832"/>
+          </a:xfrm>
+          <a:prstGeom prst="rect">
+            <a:avLst/>
+          </a:prstGeom>
+          <a:noFill/>
+          <a:ln/>
+        </p:spPr>
+        <p:txBody>
           <a:bodyPr wrap="square" lIns="0" tIns="0" rIns="0" bIns="0" rtlCol="0" anchor="t"/>
           <a:lstStyle/>
           <a:p>
+            <a:pPr indent="0" marL="0">
+              <a:lnSpc>
+                <a:spcPts val="1300"/>
+              </a:lnSpc>
+              <a:spcAft>
+                <a:spcPts val="500"/>
+              </a:spcAft>
+              <a:buNone/>
+            </a:pPr>
+            <a:r>
+              <a:rPr lang="en-US" sz="950" dirty="0">
+                <a:solidFill>
+                  <a:srgbClr val="1A1A1A"/>
+                </a:solidFill>
+                <a:latin typeface="Calibri" pitchFamily="34" charset="0"/>
+                <a:ea typeface="Calibri" pitchFamily="34" charset="-122"/>
+                <a:cs typeface="Calibri" pitchFamily="34" charset="-120"/>
+              </a:rPr>
+              <a:t>Disha reads the page's own controls and their accessible names, then marks the ONE next step with a colour-coded dot.</a:t>
+            </a:r>
+            <a:endParaRPr lang="en-US" sz="950" dirty="0"/>
+          </a:p>
+          <a:p>
             <a:pPr marL="342900" indent="-342900">
               <a:lnSpc>
-                <a:spcPts val="2200"/>
+                <a:spcPts val="1300"/>
               </a:lnSpc>
               <a:spcAft>
-                <a:spcPts val="1000"/>
+                <a:spcPts val="500"/>
               </a:spcAft>
               <a:buSzPct val="100000"/>
               <a:buChar char="•"/>
             </a:pPr>
             <a:r>
-              <a:rPr lang="en-US" sz="1500" dirty="0">
-                <a:solidFill>
-                  <a:srgbClr val="111827"/>
-                </a:solidFill>
-                <a:latin typeface="Calibri" pitchFamily="34" charset="0"/>
-                <a:ea typeface="Calibri" pitchFamily="34" charset="-122"/>
-                <a:cs typeface="Calibri" pitchFamily="34" charset="-120"/>
-              </a:rPr>
-              <a:t>Disha reads the page's own controls and their accessible names, then marks the one next step with a colour-coded dot.</a:t>
-            </a:r>
-            <a:endParaRPr lang="en-US" sz="1500" dirty="0"/>
+              <a:rPr lang="en-US" sz="950" dirty="0">
+                <a:solidFill>
+                  <a:srgbClr val="1A1A1A"/>
+                </a:solidFill>
+                <a:latin typeface="Calibri" pitchFamily="34" charset="0"/>
+                <a:ea typeface="Calibri" pitchFamily="34" charset="-122"/>
+                <a:cs typeface="Calibri" pitchFamily="34" charset="-120"/>
+              </a:rPr>
+              <a:t>You click. Disha never can. At an OTP or payment step it pauses and hands control back.</a:t>
+            </a:r>
+            <a:endParaRPr lang="en-US" sz="950" dirty="0"/>
           </a:p>
           <a:p>
             <a:pPr marL="342900" indent="-342900">
               <a:lnSpc>
-                <a:spcPts val="2200"/>
+                <a:spcPts val="1300"/>
               </a:lnSpc>
               <a:spcAft>
-                <a:spcPts val="1000"/>
+                <a:spcPts val="500"/>
               </a:spcAft>
               <a:buSzPct val="100000"/>
               <a:buChar char="•"/>
             </a:pPr>
             <a:r>
-              <a:rPr lang="en-US" sz="1500" dirty="0">
-                <a:solidFill>
-                  <a:srgbClr val="111827"/>
-                </a:solidFill>
-                <a:latin typeface="Calibri" pitchFamily="34" charset="0"/>
-                <a:ea typeface="Calibri" pitchFamily="34" charset="-122"/>
-                <a:cs typeface="Calibri" pitchFamily="34" charset="-120"/>
-              </a:rPr>
-              <a:t>You click. Disha never can. At an OTP or payment step it pauses and hands control back.</a:t>
-            </a:r>
-            <a:endParaRPr lang="en-US" sz="1500" dirty="0"/>
+              <a:rPr lang="en-US" sz="950" dirty="0">
+                <a:solidFill>
+                  <a:srgbClr val="1A1A1A"/>
+                </a:solidFill>
+                <a:latin typeface="Calibri" pitchFamily="34" charset="0"/>
+                <a:ea typeface="Calibri" pitchFamily="34" charset="-122"/>
+                <a:cs typeface="Calibri" pitchFamily="34" charset="-120"/>
+              </a:rPr>
+              <a:t>Every success dims the dot; five clean repetitions remove it entirely.</a:t>
+            </a:r>
+            <a:endParaRPr lang="en-US" sz="950" dirty="0"/>
           </a:p>
           <a:p>
             <a:pPr marL="342900" indent="-342900">
               <a:lnSpc>
-                <a:spcPts val="2200"/>
+                <a:spcPts val="1300"/>
               </a:lnSpc>
               <a:spcAft>
-                <a:spcPts val="1000"/>
+                <a:spcPts val="500"/>
               </a:spcAft>
               <a:buSzPct val="100000"/>
               <a:buChar char="•"/>
             </a:pPr>
             <a:r>
-              <a:rPr lang="en-US" sz="1500" dirty="0">
-                <a:solidFill>
-                  <a:srgbClr val="111827"/>
-                </a:solidFill>
-                <a:latin typeface="Calibri" pitchFamily="34" charset="0"/>
-                <a:ea typeface="Calibri" pitchFamily="34" charset="-122"/>
-                <a:cs typeface="Calibri" pitchFamily="34" charset="-120"/>
-              </a:rPr>
-              <a:t>Every success dims the dot; five clean repetitions remove it entirely.</a:t>
-            </a:r>
-            <a:endParaRPr lang="en-US" sz="1500" dirty="0"/>
-          </a:p>
-        </p:txBody>
-      </p:sp>
-      <p:sp>
-        <p:nvSpPr>
-          <p:cNvPr id="5" name="Text 3"/>
+              <a:rPr lang="en-US" sz="950" dirty="0">
+                <a:solidFill>
+                  <a:srgbClr val="1A1A1A"/>
+                </a:solidFill>
+                <a:latin typeface="Calibri" pitchFamily="34" charset="0"/>
+                <a:ea typeface="Calibri" pitchFamily="34" charset="-122"/>
+                <a:cs typeface="Calibri" pitchFamily="34" charset="-120"/>
+              </a:rPr>
+              <a:t>Runs on any portal - nothing is scripted in advance.</a:t>
+            </a:r>
+            <a:endParaRPr lang="en-US" sz="950" dirty="0"/>
+          </a:p>
+        </p:txBody>
+      </p:sp>
+      <p:sp>
+        <p:nvSpPr>
+          <p:cNvPr id="12" name="Shape 10"/>
+          <p:cNvSpPr/>
+          <p:nvPr/>
+        </p:nvSpPr>
+        <p:spPr>
+          <a:xfrm>
+            <a:off x="4526280" y="804672"/>
+            <a:ext cx="4361688" cy="1225296"/>
+          </a:xfrm>
+          <a:prstGeom prst="rect">
+            <a:avLst/>
+          </a:prstGeom>
+          <a:solidFill>
+            <a:srgbClr val="FFFFFF"/>
+          </a:solidFill>
+          <a:ln w="12700">
+            <a:solidFill>
+              <a:srgbClr val="4A7EBB"/>
+            </a:solidFill>
+            <a:prstDash val="solid"/>
+          </a:ln>
+        </p:spPr>
+      </p:sp>
+      <p:sp>
+        <p:nvSpPr>
+          <p:cNvPr id="13" name="Text 11"/>
           <p:cNvSpPr txBox="1"/>
           <p:nvPr/>
         </p:nvSpPr>
         <p:spPr>
           <a:xfrm>
-            <a:off x="548640" y="4572000"/>
-            <a:ext cx="5577840" cy="1371600"/>
+            <a:off x="4636008" y="868680"/>
+            <a:ext cx="4142232" cy="237744"/>
           </a:xfrm>
           <a:prstGeom prst="rect">
             <a:avLst/>
@@ -1807,29 +2394,278 @@
           <a:lstStyle/>
           <a:p>
             <a:pPr indent="0" marL="0">
-              <a:lnSpc>
-                <a:spcPts val="1600"/>
-              </a:lnSpc>
-              <a:buNone/>
-            </a:pPr>
-            <a:r>
-              <a:rPr lang="en-US" sz="1200" dirty="0">
-                <a:solidFill>
-                  <a:srgbClr val="4B5563"/>
-                </a:solidFill>
-                <a:latin typeface="Calibri" pitchFamily="34" charset="0"/>
-                <a:ea typeface="Calibri" pitchFamily="34" charset="-122"/>
-                <a:cs typeface="Calibri" pitchFamily="34" charset="-120"/>
-              </a:rPr>
-              <a:t>Honesty: the closest shipped product is Microsoft Copilot Vision "Highlights". We do not claim to have invented AI screen-understanding or on-screen pointing. Our contribution is the combination - exposed confidence, DOM + ARIA grounding, a fading scaffold, and Indian public-service task packs.</a:t>
-            </a:r>
-            <a:endParaRPr lang="en-US" sz="1200" dirty="0"/>
+              <a:buNone/>
+            </a:pPr>
+            <a:r>
+              <a:rPr lang="en-US" sz="1150" b="1" dirty="0">
+                <a:solidFill>
+                  <a:srgbClr val="2E74B5"/>
+                </a:solidFill>
+                <a:latin typeface="Calibri" pitchFamily="34" charset="0"/>
+                <a:ea typeface="Calibri" pitchFamily="34" charset="-122"/>
+                <a:cs typeface="Calibri" pitchFamily="34" charset="-120"/>
+              </a:rPr>
+              <a:t>Problem Resolution :</a:t>
+            </a:r>
+            <a:endParaRPr lang="en-US" sz="1150" dirty="0"/>
+          </a:p>
+        </p:txBody>
+      </p:sp>
+      <p:sp>
+        <p:nvSpPr>
+          <p:cNvPr id="14" name="Text 12"/>
+          <p:cNvSpPr txBox="1"/>
+          <p:nvPr/>
+        </p:nvSpPr>
+        <p:spPr>
+          <a:xfrm>
+            <a:off x="4654296" y="1115568"/>
+            <a:ext cx="4105656" cy="822960"/>
+          </a:xfrm>
+          <a:prstGeom prst="rect">
+            <a:avLst/>
+          </a:prstGeom>
+          <a:noFill/>
+          <a:ln/>
+        </p:spPr>
+        <p:txBody>
+          <a:bodyPr wrap="square" lIns="0" tIns="0" rIns="0" bIns="0" rtlCol="0" anchor="t"/>
+          <a:lstStyle/>
+          <a:p>
+            <a:pPr marL="342900" indent="-342900">
+              <a:lnSpc>
+                <a:spcPts val="1300"/>
+              </a:lnSpc>
+              <a:spcAft>
+                <a:spcPts val="500"/>
+              </a:spcAft>
+              <a:buSzPct val="100000"/>
+              <a:buChar char="•"/>
+            </a:pPr>
+            <a:r>
+              <a:rPr lang="en-US" sz="850" dirty="0">
+                <a:solidFill>
+                  <a:srgbClr val="1A1A1A"/>
+                </a:solidFill>
+                <a:latin typeface="Calibri" pitchFamily="34" charset="0"/>
+                <a:ea typeface="Calibri" pitchFamily="34" charset="-122"/>
+                <a:cs typeface="Calibri" pitchFamily="34" charset="-120"/>
+              </a:rPr>
+              <a:t>A citizen who does not know the word 'withdraw' still finishes the task - and finishes it themselves.</a:t>
+            </a:r>
+            <a:endParaRPr lang="en-US" sz="850" dirty="0"/>
+          </a:p>
+          <a:p>
+            <a:pPr marL="342900" indent="-342900">
+              <a:lnSpc>
+                <a:spcPts val="1300"/>
+              </a:lnSpc>
+              <a:spcAft>
+                <a:spcPts val="500"/>
+              </a:spcAft>
+              <a:buSzPct val="100000"/>
+              <a:buChar char="•"/>
+            </a:pPr>
+            <a:r>
+              <a:rPr lang="en-US" sz="850" dirty="0">
+                <a:solidFill>
+                  <a:srgbClr val="1A1A1A"/>
+                </a:solidFill>
+                <a:latin typeface="Calibri" pitchFamily="34" charset="0"/>
+                <a:ea typeface="Calibri" pitchFamily="34" charset="-122"/>
+                <a:cs typeface="Calibri" pitchFamily="34" charset="-120"/>
+              </a:rPr>
+              <a:t>No paid intermediary, no travel, no 'come back next week'.</a:t>
+            </a:r>
+            <a:endParaRPr lang="en-US" sz="850" dirty="0"/>
+          </a:p>
+          <a:p>
+            <a:pPr marL="342900" indent="-342900">
+              <a:lnSpc>
+                <a:spcPts val="1300"/>
+              </a:lnSpc>
+              <a:spcAft>
+                <a:spcPts val="500"/>
+              </a:spcAft>
+              <a:buSzPct val="100000"/>
+              <a:buChar char="•"/>
+            </a:pPr>
+            <a:r>
+              <a:rPr lang="en-US" sz="850" dirty="0">
+                <a:solidFill>
+                  <a:srgbClr val="1A1A1A"/>
+                </a:solidFill>
+                <a:latin typeface="Calibri" pitchFamily="34" charset="0"/>
+                <a:ea typeface="Calibri" pitchFamily="34" charset="-122"/>
+                <a:cs typeface="Calibri" pitchFamily="34" charset="-120"/>
+              </a:rPr>
+              <a:t>It points instead of clicking, so it is safe where an autopilot agent is not.</a:t>
+            </a:r>
+            <a:endParaRPr lang="en-US" sz="850" dirty="0"/>
+          </a:p>
+        </p:txBody>
+      </p:sp>
+      <p:sp>
+        <p:nvSpPr>
+          <p:cNvPr id="15" name="Shape 13"/>
+          <p:cNvSpPr/>
+          <p:nvPr/>
+        </p:nvSpPr>
+        <p:spPr>
+          <a:xfrm>
+            <a:off x="4526280" y="2103120"/>
+            <a:ext cx="4361688" cy="1188720"/>
+          </a:xfrm>
+          <a:prstGeom prst="rect">
+            <a:avLst/>
+          </a:prstGeom>
+          <a:solidFill>
+            <a:srgbClr val="FFFFFF"/>
+          </a:solidFill>
+          <a:ln w="12700">
+            <a:solidFill>
+              <a:srgbClr val="4A7EBB"/>
+            </a:solidFill>
+            <a:prstDash val="solid"/>
+          </a:ln>
+        </p:spPr>
+      </p:sp>
+      <p:sp>
+        <p:nvSpPr>
+          <p:cNvPr id="16" name="Text 14"/>
+          <p:cNvSpPr txBox="1"/>
+          <p:nvPr/>
+        </p:nvSpPr>
+        <p:spPr>
+          <a:xfrm>
+            <a:off x="4636008" y="2167128"/>
+            <a:ext cx="4142232" cy="237744"/>
+          </a:xfrm>
+          <a:prstGeom prst="rect">
+            <a:avLst/>
+          </a:prstGeom>
+          <a:noFill/>
+          <a:ln/>
+        </p:spPr>
+        <p:txBody>
+          <a:bodyPr wrap="square" lIns="0" tIns="0" rIns="0" bIns="0" rtlCol="0" anchor="ctr"/>
+          <a:lstStyle/>
+          <a:p>
+            <a:pPr indent="0" marL="0">
+              <a:buNone/>
+            </a:pPr>
+            <a:r>
+              <a:rPr lang="en-US" sz="1150" b="1" dirty="0">
+                <a:solidFill>
+                  <a:srgbClr val="2E74B5"/>
+                </a:solidFill>
+                <a:latin typeface="Calibri" pitchFamily="34" charset="0"/>
+                <a:ea typeface="Calibri" pitchFamily="34" charset="-122"/>
+                <a:cs typeface="Calibri" pitchFamily="34" charset="-120"/>
+              </a:rPr>
+              <a:t>Unique Value Propositions (UVP) :</a:t>
+            </a:r>
+            <a:endParaRPr lang="en-US" sz="1150" dirty="0"/>
+          </a:p>
+        </p:txBody>
+      </p:sp>
+      <p:sp>
+        <p:nvSpPr>
+          <p:cNvPr id="17" name="Text 15"/>
+          <p:cNvSpPr txBox="1"/>
+          <p:nvPr/>
+        </p:nvSpPr>
+        <p:spPr>
+          <a:xfrm>
+            <a:off x="4654296" y="2414016"/>
+            <a:ext cx="4105656" cy="786384"/>
+          </a:xfrm>
+          <a:prstGeom prst="rect">
+            <a:avLst/>
+          </a:prstGeom>
+          <a:noFill/>
+          <a:ln/>
+        </p:spPr>
+        <p:txBody>
+          <a:bodyPr wrap="square" lIns="0" tIns="0" rIns="0" bIns="0" rtlCol="0" anchor="t"/>
+          <a:lstStyle/>
+          <a:p>
+            <a:pPr marL="342900" indent="-342900">
+              <a:lnSpc>
+                <a:spcPts val="1300"/>
+              </a:lnSpc>
+              <a:spcAft>
+                <a:spcPts val="500"/>
+              </a:spcAft>
+              <a:buSzPct val="100000"/>
+              <a:buChar char="•"/>
+            </a:pPr>
+            <a:r>
+              <a:rPr lang="en-US" sz="850" dirty="0">
+                <a:solidFill>
+                  <a:srgbClr val="1A1A1A"/>
+                </a:solidFill>
+                <a:latin typeface="Calibri" pitchFamily="34" charset="0"/>
+                <a:ea typeface="Calibri" pitchFamily="34" charset="-122"/>
+                <a:cs typeface="Calibri" pitchFamily="34" charset="-120"/>
+              </a:rPr>
+              <a:t>Confidence you can see - the dot's colour is not the model's self-report; page evidence is scored separately and both must agree.</a:t>
+            </a:r>
+            <a:endParaRPr lang="en-US" sz="850" dirty="0"/>
+          </a:p>
+          <a:p>
+            <a:pPr marL="342900" indent="-342900">
+              <a:lnSpc>
+                <a:spcPts val="1300"/>
+              </a:lnSpc>
+              <a:spcAft>
+                <a:spcPts val="500"/>
+              </a:spcAft>
+              <a:buSzPct val="100000"/>
+              <a:buChar char="•"/>
+            </a:pPr>
+            <a:r>
+              <a:rPr lang="en-US" sz="850" dirty="0">
+                <a:solidFill>
+                  <a:srgbClr val="1A1A1A"/>
+                </a:solidFill>
+                <a:latin typeface="Calibri" pitchFamily="34" charset="0"/>
+                <a:ea typeface="Calibri" pitchFamily="34" charset="-122"/>
+                <a:cs typeface="Calibri" pitchFamily="34" charset="-120"/>
+              </a:rPr>
+              <a:t>It teaches, then leaves - guidance fades on success, returns after a mistake.</a:t>
+            </a:r>
+            <a:endParaRPr lang="en-US" sz="850" dirty="0"/>
+          </a:p>
+          <a:p>
+            <a:pPr marL="342900" indent="-342900">
+              <a:lnSpc>
+                <a:spcPts val="1300"/>
+              </a:lnSpc>
+              <a:spcAft>
+                <a:spcPts val="500"/>
+              </a:spcAft>
+              <a:buSzPct val="100000"/>
+              <a:buChar char="•"/>
+            </a:pPr>
+            <a:r>
+              <a:rPr lang="en-US" sz="850" dirty="0">
+                <a:solidFill>
+                  <a:srgbClr val="1A1A1A"/>
+                </a:solidFill>
+                <a:latin typeface="Calibri" pitchFamily="34" charset="0"/>
+                <a:ea typeface="Calibri" pitchFamily="34" charset="-122"/>
+                <a:cs typeface="Calibri" pitchFamily="34" charset="-120"/>
+              </a:rPr>
+              <a:t>Zero integration cost - no ministry rebuilds anything.</a:t>
+            </a:r>
+            <a:endParaRPr lang="en-US" sz="850" dirty="0"/>
           </a:p>
         </p:txBody>
       </p:sp>
       <p:pic>
         <p:nvPicPr>
-          <p:cNvPr id="6" name="Image 0" descr="F:\SIH\deck\assets\demo-step3.png">    </p:cNvPr>
+          <p:cNvPr id="18" name="Image 0" descr="F:\SIH\deck\assets\demo-step3.png">    </p:cNvPr>
           <p:cNvPicPr>
             <a:picLocks noChangeAspect="1"/>
           </p:cNvPicPr>
@@ -1843,14 +2679,56 @@
         </p:blipFill>
         <p:spPr>
           <a:xfrm>
-            <a:off x="6309360" y="1600200"/>
-            <a:ext cx="5486400" cy="3086100"/>
+            <a:off x="256032" y="3401568"/>
+            <a:ext cx="2286000" cy="1285875"/>
           </a:xfrm>
           <a:prstGeom prst="rect">
             <a:avLst/>
           </a:prstGeom>
         </p:spPr>
       </p:pic>
+      <p:sp>
+        <p:nvSpPr>
+          <p:cNvPr id="19" name="Text 16"/>
+          <p:cNvSpPr txBox="1"/>
+          <p:nvPr/>
+        </p:nvSpPr>
+        <p:spPr>
+          <a:xfrm>
+            <a:off x="2697480" y="3474720"/>
+            <a:ext cx="6190488" cy="960120"/>
+          </a:xfrm>
+          <a:prstGeom prst="rect">
+            <a:avLst/>
+          </a:prstGeom>
+          <a:noFill/>
+          <a:ln/>
+        </p:spPr>
+        <p:txBody>
+          <a:bodyPr wrap="square" lIns="0" tIns="0" rIns="0" bIns="0" rtlCol="0" anchor="ctr"/>
+          <a:lstStyle/>
+          <a:p>
+            <a:pPr indent="0" marL="0">
+              <a:lnSpc>
+                <a:spcPts val="1100"/>
+              </a:lnSpc>
+              <a:buNone/>
+            </a:pPr>
+            <a:r>
+              <a:rPr lang="en-US" sz="850" i="1" dirty="0">
+                <a:solidFill>
+                  <a:srgbClr val="595959"/>
+                </a:solidFill>
+                <a:latin typeface="Calibri" pitchFamily="34" charset="0"/>
+                <a:ea typeface="Calibri" pitchFamily="34" charset="-122"/>
+                <a:cs typeface="Calibri" pitchFamily="34" charset="-120"/>
+              </a:rPr>
+              <a:t>Closest shipped product: Microsoft Copilot Vision "Highlights". We do not claim to have invented on-screen pointing. Ours is the combination - exposed confidence, DOM + ARIA grounding, a fading scaffold, and India-specific task packs.</a:t>
+            </a:r>
+            <a:endParaRPr lang="en-US" sz="850" dirty="0"/>
+          </a:p>
+        </p:txBody>
+      </p:sp>
     </p:spTree>
   </p:cSld>
   <p:clrMapOvr>
@@ -1878,42 +2756,28 @@
       </p:grpSpPr>
       <p:sp>
         <p:nvSpPr>
-          <p:cNvPr id="2" name="Text 0"/>
-          <p:cNvSpPr txBox="1"/>
-          <p:nvPr/>
-        </p:nvSpPr>
-        <p:spPr>
-          <a:xfrm>
-            <a:off x="548640" y="320040"/>
-            <a:ext cx="11064240" cy="274320"/>
-          </a:xfrm>
-          <a:prstGeom prst="rect">
-            <a:avLst/>
-          </a:prstGeom>
-          <a:noFill/>
-          <a:ln/>
-        </p:spPr>
-        <p:txBody>
-          <a:bodyPr wrap="square" lIns="0" tIns="0" rIns="0" bIns="0" rtlCol="0" anchor="ctr"/>
-          <a:lstStyle/>
-          <a:p>
-            <a:pPr indent="0" marL="0">
-              <a:buNone/>
-            </a:pPr>
-            <a:r>
-              <a:rPr lang="en-US" sz="1200" b="1" spc="150" kern="0" dirty="0">
-                <a:solidFill>
-                  <a:srgbClr val="4B5563"/>
-                </a:solidFill>
-                <a:latin typeface="Calibri" pitchFamily="34" charset="0"/>
-                <a:ea typeface="Calibri" pitchFamily="34" charset="-122"/>
-                <a:cs typeface="Calibri" pitchFamily="34" charset="-120"/>
-              </a:rPr>
-              <a:t>TECHNICAL APPROACH</a:t>
-            </a:r>
-            <a:endParaRPr lang="en-US" sz="1200" dirty="0"/>
-          </a:p>
-        </p:txBody>
+          <p:cNvPr id="2" name="Shape 0"/>
+          <p:cNvSpPr/>
+          <p:nvPr/>
+        </p:nvSpPr>
+        <p:spPr>
+          <a:xfrm>
+            <a:off x="164592" y="109728"/>
+            <a:ext cx="1234440" cy="566928"/>
+          </a:xfrm>
+          <a:prstGeom prst="ellipse">
+            <a:avLst/>
+          </a:prstGeom>
+          <a:solidFill>
+            <a:srgbClr val="FFFFFF"/>
+          </a:solidFill>
+          <a:ln w="15875">
+            <a:solidFill>
+              <a:srgbClr val="7C6BAF"/>
+            </a:solidFill>
+            <a:prstDash val="solid"/>
+          </a:ln>
+        </p:spPr>
       </p:sp>
       <p:sp>
         <p:nvSpPr>
@@ -1923,8 +2787,8 @@
         </p:nvSpPr>
         <p:spPr>
           <a:xfrm>
-            <a:off x="548640" y="603504"/>
-            <a:ext cx="11064240" cy="777240"/>
+            <a:off x="164592" y="109728"/>
+            <a:ext cx="1234440" cy="566928"/>
           </a:xfrm>
           <a:prstGeom prst="rect">
             <a:avLst/>
@@ -1936,21 +2800,21 @@
           <a:bodyPr wrap="square" lIns="0" tIns="0" rIns="0" bIns="0" rtlCol="0" anchor="ctr"/>
           <a:lstStyle/>
           <a:p>
-            <a:pPr indent="0" marL="0">
-              <a:buNone/>
-            </a:pPr>
-            <a:r>
-              <a:rPr lang="en-US" sz="3200" b="1" dirty="0">
-                <a:solidFill>
-                  <a:srgbClr val="111827"/>
-                </a:solidFill>
-                <a:latin typeface="Calibri" pitchFamily="34" charset="0"/>
-                <a:ea typeface="Calibri" pitchFamily="34" charset="-122"/>
-                <a:cs typeface="Calibri" pitchFamily="34" charset="-120"/>
-              </a:rPr>
-              <a:t>Two judgements must agree before you see green</a:t>
-            </a:r>
-            <a:endParaRPr lang="en-US" sz="3200" dirty="0"/>
+            <a:pPr algn="ctr" indent="0" marL="0">
+              <a:buNone/>
+            </a:pPr>
+            <a:r>
+              <a:rPr lang="en-US" sz="1100" dirty="0">
+                <a:solidFill>
+                  <a:srgbClr val="1A1A1A"/>
+                </a:solidFill>
+                <a:latin typeface="Calibri" pitchFamily="34" charset="0"/>
+                <a:ea typeface="Calibri" pitchFamily="34" charset="-122"/>
+                <a:cs typeface="Calibri" pitchFamily="34" charset="-120"/>
+              </a:rPr>
+              <a:t>Code Blooded</a:t>
+            </a:r>
+            <a:endParaRPr lang="en-US" sz="1100" dirty="0"/>
           </a:p>
         </p:txBody>
       </p:sp>
@@ -1962,8 +2826,8 @@
         </p:nvSpPr>
         <p:spPr>
           <a:xfrm>
-            <a:off x="548640" y="1600200"/>
-            <a:ext cx="4663440" cy="3108960"/>
+            <a:off x="1463040" y="128016"/>
+            <a:ext cx="6126480" cy="530352"/>
           </a:xfrm>
           <a:prstGeom prst="rect">
             <a:avLst/>
@@ -1972,92 +2836,403 @@
           <a:ln/>
         </p:spPr>
         <p:txBody>
+          <a:bodyPr wrap="square" lIns="0" tIns="0" rIns="0" bIns="0" rtlCol="0" anchor="ctr"/>
+          <a:lstStyle/>
+          <a:p>
+            <a:pPr algn="ctr" indent="0" marL="0">
+              <a:buNone/>
+            </a:pPr>
+            <a:r>
+              <a:rPr lang="en-US" sz="2600" b="1" dirty="0">
+                <a:solidFill>
+                  <a:srgbClr val="1F3864"/>
+                </a:solidFill>
+                <a:latin typeface="Cambria" pitchFamily="34" charset="0"/>
+                <a:ea typeface="Cambria" pitchFamily="34" charset="-122"/>
+                <a:cs typeface="Cambria" pitchFamily="34" charset="-120"/>
+              </a:rPr>
+              <a:t>TECHNICAL APPROACH</a:t>
+            </a:r>
+            <a:endParaRPr lang="en-US" sz="2600" dirty="0"/>
+          </a:p>
+        </p:txBody>
+      </p:sp>
+      <p:sp>
+        <p:nvSpPr>
+          <p:cNvPr id="5" name="Text 3"/>
+          <p:cNvSpPr txBox="1"/>
+          <p:nvPr/>
+        </p:nvSpPr>
+        <p:spPr>
+          <a:xfrm>
+            <a:off x="7699248" y="128016"/>
+            <a:ext cx="1316736" cy="548640"/>
+          </a:xfrm>
+          <a:prstGeom prst="rect">
+            <a:avLst/>
+          </a:prstGeom>
+          <a:noFill/>
+          <a:ln w="9525">
+            <a:solidFill>
+              <a:srgbClr val="DDDDDD"/>
+            </a:solidFill>
+            <a:prstDash val="dash"/>
+          </a:ln>
+        </p:spPr>
+        <p:txBody>
+          <a:bodyPr wrap="square" lIns="0" tIns="0" rIns="0" bIns="0" rtlCol="0" anchor="ctr"/>
+          <a:lstStyle/>
+          <a:p>
+            <a:pPr algn="ctr" indent="0" marL="0">
+              <a:buNone/>
+            </a:pPr>
+            <a:r>
+              <a:rPr lang="en-US" sz="750" i="1" dirty="0">
+                <a:solidFill>
+                  <a:srgbClr val="AAAAAA"/>
+                </a:solidFill>
+                <a:latin typeface="Calibri" pitchFamily="34" charset="0"/>
+                <a:ea typeface="Calibri" pitchFamily="34" charset="-122"/>
+                <a:cs typeface="Calibri" pitchFamily="34" charset="-120"/>
+              </a:rPr>
+              <a:t>SIH 2026 logo</a:t>
+            </a:r>
+            <a:endParaRPr lang="en-US" sz="750" dirty="0"/>
+          </a:p>
+          <a:p>
+            <a:pPr algn="ctr" indent="0" marL="0">
+              <a:buNone/>
+            </a:pPr>
+            <a:r>
+              <a:rPr lang="en-US" sz="750" i="1" dirty="0">
+                <a:solidFill>
+                  <a:srgbClr val="AAAAAA"/>
+                </a:solidFill>
+                <a:latin typeface="Calibri" pitchFamily="34" charset="0"/>
+                <a:ea typeface="Calibri" pitchFamily="34" charset="-122"/>
+                <a:cs typeface="Calibri" pitchFamily="34" charset="-120"/>
+              </a:rPr>
+              <a:t>(from the official template)</a:t>
+            </a:r>
+            <a:endParaRPr lang="en-US" sz="750" dirty="0"/>
+          </a:p>
+        </p:txBody>
+      </p:sp>
+      <p:sp>
+        <p:nvSpPr>
+          <p:cNvPr id="6" name="Shape 4"/>
+          <p:cNvSpPr/>
+          <p:nvPr/>
+        </p:nvSpPr>
+        <p:spPr>
+          <a:xfrm>
+            <a:off x="0" y="4832604"/>
+            <a:ext cx="9144000" cy="310896"/>
+          </a:xfrm>
+          <a:prstGeom prst="rect">
+            <a:avLst/>
+          </a:prstGeom>
+          <a:solidFill>
+            <a:srgbClr val="1F7AC4"/>
+          </a:solidFill>
+          <a:ln/>
+        </p:spPr>
+      </p:sp>
+      <p:sp>
+        <p:nvSpPr>
+          <p:cNvPr id="7" name="Text 5"/>
+          <p:cNvSpPr txBox="1"/>
+          <p:nvPr/>
+        </p:nvSpPr>
+        <p:spPr>
+          <a:xfrm>
+            <a:off x="0" y="4832604"/>
+            <a:ext cx="9144000" cy="310896"/>
+          </a:xfrm>
+          <a:prstGeom prst="rect">
+            <a:avLst/>
+          </a:prstGeom>
+          <a:noFill/>
+          <a:ln/>
+        </p:spPr>
+        <p:txBody>
+          <a:bodyPr wrap="square" lIns="0" tIns="0" rIns="0" bIns="0" rtlCol="0" anchor="ctr"/>
+          <a:lstStyle/>
+          <a:p>
+            <a:pPr algn="ctr" indent="0" marL="0">
+              <a:buNone/>
+            </a:pPr>
+            <a:r>
+              <a:rPr lang="en-US" sz="1000" dirty="0">
+                <a:solidFill>
+                  <a:srgbClr val="FFFFFF"/>
+                </a:solidFill>
+                <a:latin typeface="Calibri" pitchFamily="34" charset="0"/>
+                <a:ea typeface="Calibri" pitchFamily="34" charset="-122"/>
+                <a:cs typeface="Calibri" pitchFamily="34" charset="-120"/>
+              </a:rPr>
+              <a:t>@SIH Idea submission- Template</a:t>
+            </a:r>
+            <a:endParaRPr lang="en-US" sz="1000" dirty="0"/>
+          </a:p>
+        </p:txBody>
+      </p:sp>
+      <p:sp>
+        <p:nvSpPr>
+          <p:cNvPr id="8" name="Text 6"/>
+          <p:cNvSpPr txBox="1"/>
+          <p:nvPr/>
+        </p:nvSpPr>
+        <p:spPr>
+          <a:xfrm>
+            <a:off x="8595360" y="4832604"/>
+            <a:ext cx="365760" cy="310896"/>
+          </a:xfrm>
+          <a:prstGeom prst="rect">
+            <a:avLst/>
+          </a:prstGeom>
+          <a:noFill/>
+          <a:ln/>
+        </p:spPr>
+        <p:txBody>
+          <a:bodyPr wrap="square" lIns="0" tIns="0" rIns="0" bIns="0" rtlCol="0" anchor="ctr"/>
+          <a:lstStyle/>
+          <a:p>
+            <a:pPr algn="r" indent="0" marL="0">
+              <a:buNone/>
+            </a:pPr>
+            <a:r>
+              <a:rPr lang="en-US" sz="1000" b="1" dirty="0">
+                <a:solidFill>
+                  <a:srgbClr val="FFFFFF"/>
+                </a:solidFill>
+                <a:latin typeface="Calibri" pitchFamily="34" charset="0"/>
+                <a:ea typeface="Calibri" pitchFamily="34" charset="-122"/>
+                <a:cs typeface="Calibri" pitchFamily="34" charset="-120"/>
+              </a:rPr>
+              <a:t>3</a:t>
+            </a:r>
+            <a:endParaRPr lang="en-US" sz="1000" dirty="0"/>
+          </a:p>
+        </p:txBody>
+      </p:sp>
+      <p:sp>
+        <p:nvSpPr>
+          <p:cNvPr id="9" name="Shape 7"/>
+          <p:cNvSpPr/>
+          <p:nvPr/>
+        </p:nvSpPr>
+        <p:spPr>
+          <a:xfrm>
+            <a:off x="256032" y="804672"/>
+            <a:ext cx="3200400" cy="2148840"/>
+          </a:xfrm>
+          <a:prstGeom prst="rect">
+            <a:avLst/>
+          </a:prstGeom>
+          <a:solidFill>
+            <a:srgbClr val="FFFFFF"/>
+          </a:solidFill>
+          <a:ln w="12700">
+            <a:solidFill>
+              <a:srgbClr val="4A7EBB"/>
+            </a:solidFill>
+            <a:prstDash val="solid"/>
+          </a:ln>
+        </p:spPr>
+      </p:sp>
+      <p:sp>
+        <p:nvSpPr>
+          <p:cNvPr id="10" name="Text 8"/>
+          <p:cNvSpPr txBox="1"/>
+          <p:nvPr/>
+        </p:nvSpPr>
+        <p:spPr>
+          <a:xfrm>
+            <a:off x="365760" y="868680"/>
+            <a:ext cx="2980944" cy="237744"/>
+          </a:xfrm>
+          <a:prstGeom prst="rect">
+            <a:avLst/>
+          </a:prstGeom>
+          <a:noFill/>
+          <a:ln/>
+        </p:spPr>
+        <p:txBody>
+          <a:bodyPr wrap="square" lIns="0" tIns="0" rIns="0" bIns="0" rtlCol="0" anchor="ctr"/>
+          <a:lstStyle/>
+          <a:p>
+            <a:pPr indent="0" marL="0">
+              <a:buNone/>
+            </a:pPr>
+            <a:r>
+              <a:rPr lang="en-US" sz="1150" b="1" dirty="0">
+                <a:solidFill>
+                  <a:srgbClr val="2E74B5"/>
+                </a:solidFill>
+                <a:latin typeface="Calibri" pitchFamily="34" charset="0"/>
+                <a:ea typeface="Calibri" pitchFamily="34" charset="-122"/>
+                <a:cs typeface="Calibri" pitchFamily="34" charset="-120"/>
+              </a:rPr>
+              <a:t>Technologies used</a:t>
+            </a:r>
+            <a:endParaRPr lang="en-US" sz="1150" dirty="0"/>
+          </a:p>
+        </p:txBody>
+      </p:sp>
+      <p:sp>
+        <p:nvSpPr>
+          <p:cNvPr id="11" name="Text 9"/>
+          <p:cNvSpPr txBox="1"/>
+          <p:nvPr/>
+        </p:nvSpPr>
+        <p:spPr>
+          <a:xfrm>
+            <a:off x="384048" y="1115568"/>
+            <a:ext cx="2944368" cy="1746504"/>
+          </a:xfrm>
+          <a:prstGeom prst="rect">
+            <a:avLst/>
+          </a:prstGeom>
+          <a:noFill/>
+          <a:ln/>
+        </p:spPr>
+        <p:txBody>
           <a:bodyPr wrap="square" lIns="0" tIns="0" rIns="0" bIns="0" rtlCol="0" anchor="t"/>
           <a:lstStyle/>
           <a:p>
             <a:pPr marL="342900" indent="-342900">
               <a:lnSpc>
-                <a:spcPts val="2200"/>
+                <a:spcPts val="1300"/>
               </a:lnSpc>
               <a:spcAft>
-                <a:spcPts val="1000"/>
+                <a:spcPts val="500"/>
               </a:spcAft>
               <a:buSzPct val="100000"/>
               <a:buChar char="•"/>
             </a:pPr>
             <a:r>
-              <a:rPr lang="en-US" sz="1500" dirty="0">
-                <a:solidFill>
-                  <a:srgbClr val="111827"/>
-                </a:solidFill>
-                <a:latin typeface="Calibri" pitchFamily="34" charset="0"/>
-                <a:ea typeface="Calibri" pitchFamily="34" charset="-122"/>
-                <a:cs typeface="Calibri" pitchFamily="34" charset="-120"/>
-              </a:rPr>
-              <a:t>Manifest V3 Chrome extension, vanilla JavaScript, no build step. Model is pluggable: Gemini free tier, Anthropic, or a local Ollama model with no internet.</a:t>
-            </a:r>
-            <a:endParaRPr lang="en-US" sz="1500" dirty="0"/>
+              <a:rPr lang="en-US" sz="900" dirty="0">
+                <a:solidFill>
+                  <a:srgbClr val="1A1A1A"/>
+                </a:solidFill>
+                <a:latin typeface="Calibri" pitchFamily="34" charset="0"/>
+                <a:ea typeface="Calibri" pitchFamily="34" charset="-122"/>
+                <a:cs typeface="Calibri" pitchFamily="34" charset="-120"/>
+              </a:rPr>
+              <a:t>Manifest V3 Chrome extension, vanilla JavaScript, no build step.</a:t>
+            </a:r>
+            <a:endParaRPr lang="en-US" sz="900" dirty="0"/>
           </a:p>
           <a:p>
             <a:pPr marL="342900" indent="-342900">
               <a:lnSpc>
-                <a:spcPts val="2200"/>
+                <a:spcPts val="1300"/>
               </a:lnSpc>
               <a:spcAft>
-                <a:spcPts val="1000"/>
+                <a:spcPts val="500"/>
               </a:spcAft>
               <a:buSzPct val="100000"/>
               <a:buChar char="•"/>
             </a:pPr>
             <a:r>
-              <a:rPr lang="en-US" sz="1500" dirty="0">
-                <a:solidFill>
-                  <a:srgbClr val="111827"/>
-                </a:solidFill>
-                <a:latin typeface="Calibri" pitchFamily="34" charset="0"/>
-                <a:ea typeface="Calibri" pitchFamily="34" charset="-122"/>
-                <a:cs typeface="Calibri" pitchFamily="34" charset="-120"/>
-              </a:rPr>
-              <a:t>The model returns one element id and its confidence. Separately, on-device, we score the page evidence.</a:t>
-            </a:r>
-            <a:endParaRPr lang="en-US" sz="1500" dirty="0"/>
+              <a:rPr lang="en-US" sz="900" dirty="0">
+                <a:solidFill>
+                  <a:srgbClr val="1A1A1A"/>
+                </a:solidFill>
+                <a:latin typeface="Calibri" pitchFamily="34" charset="0"/>
+                <a:ea typeface="Calibri" pitchFamily="34" charset="-122"/>
+                <a:cs typeface="Calibri" pitchFamily="34" charset="-120"/>
+              </a:rPr>
+              <a:t>Model is pluggable - Gemini free tier, Anthropic, or a local Ollama model with no internet.</a:t>
+            </a:r>
+            <a:endParaRPr lang="en-US" sz="900" dirty="0"/>
           </a:p>
           <a:p>
             <a:pPr marL="342900" indent="-342900">
               <a:lnSpc>
-                <a:spcPts val="2200"/>
+                <a:spcPts val="1300"/>
               </a:lnSpc>
               <a:spcAft>
-                <a:spcPts val="1000"/>
+                <a:spcPts val="500"/>
               </a:spcAft>
               <a:buSzPct val="100000"/>
               <a:buChar char="•"/>
             </a:pPr>
             <a:r>
-              <a:rPr lang="en-US" sz="1500" dirty="0">
-                <a:solidFill>
-                  <a:srgbClr val="111827"/>
-                </a:solidFill>
-                <a:latin typeface="Calibri" pitchFamily="34" charset="0"/>
-                <a:ea typeface="Calibri" pitchFamily="34" charset="-122"/>
-                <a:cs typeface="Calibri" pitchFamily="34" charset="-120"/>
-              </a:rPr>
-              <a:t>Green needs 0.80 model AND 0.75 page evidence; we display the weaker number, never the average.</a:t>
-            </a:r>
-            <a:endParaRPr lang="en-US" sz="1500" dirty="0"/>
-          </a:p>
-        </p:txBody>
-      </p:sp>
-      <p:sp>
-        <p:nvSpPr>
-          <p:cNvPr id="5" name="Text 3"/>
+              <a:rPr lang="en-US" sz="900" dirty="0">
+                <a:solidFill>
+                  <a:srgbClr val="1A1A1A"/>
+                </a:solidFill>
+                <a:latin typeface="Calibri" pitchFamily="34" charset="0"/>
+                <a:ea typeface="Calibri" pitchFamily="34" charset="-122"/>
+                <a:cs typeface="Calibri" pitchFamily="34" charset="-120"/>
+              </a:rPr>
+              <a:t>DOM + ARIA, not Chrome's accessibility tree - that needs the debugger permission and breaks on old government markup.</a:t>
+            </a:r>
+            <a:endParaRPr lang="en-US" sz="900" dirty="0"/>
+          </a:p>
+          <a:p>
+            <a:pPr marL="342900" indent="-342900">
+              <a:lnSpc>
+                <a:spcPts val="1300"/>
+              </a:lnSpc>
+              <a:spcAft>
+                <a:spcPts val="500"/>
+              </a:spcAft>
+              <a:buSzPct val="100000"/>
+              <a:buChar char="•"/>
+            </a:pPr>
+            <a:r>
+              <a:rPr lang="en-US" sz="900" dirty="0">
+                <a:solidFill>
+                  <a:srgbClr val="1A1A1A"/>
+                </a:solidFill>
+                <a:latin typeface="Calibri" pitchFamily="34" charset="0"/>
+                <a:ea typeface="Calibri" pitchFamily="34" charset="-122"/>
+                <a:cs typeface="Calibri" pitchFamily="34" charset="-120"/>
+              </a:rPr>
+              <a:t>Vision grounding (GUI-Actor, MIT) is the documented fallback.</a:t>
+            </a:r>
+            <a:endParaRPr lang="en-US" sz="900" dirty="0"/>
+          </a:p>
+        </p:txBody>
+      </p:sp>
+      <p:sp>
+        <p:nvSpPr>
+          <p:cNvPr id="12" name="Shape 10"/>
+          <p:cNvSpPr/>
+          <p:nvPr/>
+        </p:nvSpPr>
+        <p:spPr>
+          <a:xfrm>
+            <a:off x="256032" y="3063240"/>
+            <a:ext cx="3200400" cy="1572768"/>
+          </a:xfrm>
+          <a:prstGeom prst="rect">
+            <a:avLst/>
+          </a:prstGeom>
+          <a:solidFill>
+            <a:srgbClr val="FFFFFF"/>
+          </a:solidFill>
+          <a:ln w="12700">
+            <a:solidFill>
+              <a:srgbClr val="4A7EBB"/>
+            </a:solidFill>
+            <a:prstDash val="solid"/>
+          </a:ln>
+        </p:spPr>
+      </p:sp>
+      <p:sp>
+        <p:nvSpPr>
+          <p:cNvPr id="13" name="Text 11"/>
           <p:cNvSpPr txBox="1"/>
           <p:nvPr/>
         </p:nvSpPr>
         <p:spPr>
           <a:xfrm>
-            <a:off x="548640" y="4846320"/>
-            <a:ext cx="4663440" cy="1463040"/>
+            <a:off x="365760" y="3127248"/>
+            <a:ext cx="2980944" cy="237744"/>
           </a:xfrm>
           <a:prstGeom prst="rect">
             <a:avLst/>
@@ -2070,29 +3245,120 @@
           <a:lstStyle/>
           <a:p>
             <a:pPr indent="0" marL="0">
-              <a:lnSpc>
-                <a:spcPts val="1400"/>
-              </a:lnSpc>
-              <a:buNone/>
-            </a:pPr>
-            <a:r>
-              <a:rPr lang="en-US" sz="1000" dirty="0">
-                <a:solidFill>
-                  <a:srgbClr val="4B5563"/>
-                </a:solidFill>
-                <a:latin typeface="Consolas" pitchFamily="34" charset="0"/>
-                <a:ea typeface="Consolas" pitchFamily="34" charset="-122"/>
-                <a:cs typeface="Consolas" pitchFamily="34" charset="-120"/>
-              </a:rPr>
-              <a:t>page -&gt; enumerate interactive elements + ARIA names -&gt; compact text list -&gt; model returns {id, confidence} -&gt; on-device grounding score -&gt; colour band -&gt; draw dot -&gt; human clicks -&gt; wait for DOM to settle -&gt; next step</a:t>
-            </a:r>
-            <a:endParaRPr lang="en-US" sz="1000" dirty="0"/>
+              <a:buNone/>
+            </a:pPr>
+            <a:r>
+              <a:rPr lang="en-US" sz="1050" b="1" dirty="0">
+                <a:solidFill>
+                  <a:srgbClr val="2E74B5"/>
+                </a:solidFill>
+                <a:latin typeface="Calibri" pitchFamily="34" charset="0"/>
+                <a:ea typeface="Calibri" pitchFamily="34" charset="-122"/>
+                <a:cs typeface="Calibri" pitchFamily="34" charset="-120"/>
+              </a:rPr>
+              <a:t>Methodology and process for implementation</a:t>
+            </a:r>
+            <a:endParaRPr lang="en-US" sz="1050" dirty="0"/>
+          </a:p>
+        </p:txBody>
+      </p:sp>
+      <p:sp>
+        <p:nvSpPr>
+          <p:cNvPr id="14" name="Text 12"/>
+          <p:cNvSpPr txBox="1"/>
+          <p:nvPr/>
+        </p:nvSpPr>
+        <p:spPr>
+          <a:xfrm>
+            <a:off x="384048" y="3374136"/>
+            <a:ext cx="2944368" cy="1170432"/>
+          </a:xfrm>
+          <a:prstGeom prst="rect">
+            <a:avLst/>
+          </a:prstGeom>
+          <a:noFill/>
+          <a:ln/>
+        </p:spPr>
+        <p:txBody>
+          <a:bodyPr wrap="square" lIns="0" tIns="0" rIns="0" bIns="0" rtlCol="0" anchor="t"/>
+          <a:lstStyle/>
+          <a:p>
+            <a:pPr marL="342900" indent="-342900">
+              <a:lnSpc>
+                <a:spcPts val="1300"/>
+              </a:lnSpc>
+              <a:spcAft>
+                <a:spcPts val="500"/>
+              </a:spcAft>
+              <a:buSzPct val="100000"/>
+              <a:buChar char="•"/>
+            </a:pPr>
+            <a:r>
+              <a:rPr lang="en-US" sz="900" dirty="0">
+                <a:solidFill>
+                  <a:srgbClr val="1A1A1A"/>
+                </a:solidFill>
+                <a:latin typeface="Calibri" pitchFamily="34" charset="0"/>
+                <a:ea typeface="Calibri" pitchFamily="34" charset="-122"/>
+                <a:cs typeface="Calibri" pitchFamily="34" charset="-120"/>
+              </a:rPr>
+              <a:t>Green needs 0.80 model AND 0.75 page evidence.</a:t>
+            </a:r>
+            <a:endParaRPr lang="en-US" sz="900" dirty="0"/>
+          </a:p>
+          <a:p>
+            <a:pPr marL="342900" indent="-342900">
+              <a:lnSpc>
+                <a:spcPts val="1300"/>
+              </a:lnSpc>
+              <a:spcAft>
+                <a:spcPts val="500"/>
+              </a:spcAft>
+              <a:buSzPct val="100000"/>
+              <a:buChar char="•"/>
+            </a:pPr>
+            <a:r>
+              <a:rPr lang="en-US" sz="900" dirty="0">
+                <a:solidFill>
+                  <a:srgbClr val="1A1A1A"/>
+                </a:solidFill>
+                <a:latin typeface="Calibri" pitchFamily="34" charset="0"/>
+                <a:ea typeface="Calibri" pitchFamily="34" charset="-122"/>
+                <a:cs typeface="Calibri" pitchFamily="34" charset="-120"/>
+              </a:rPr>
+              <a:t>We display the weaker of the two numbers, never the average - so the number can never contradict the colour.</a:t>
+            </a:r>
+            <a:endParaRPr lang="en-US" sz="900" dirty="0"/>
+          </a:p>
+          <a:p>
+            <a:pPr marL="342900" indent="-342900">
+              <a:lnSpc>
+                <a:spcPts val="1300"/>
+              </a:lnSpc>
+              <a:spcAft>
+                <a:spcPts val="500"/>
+              </a:spcAft>
+              <a:buSzPct val="100000"/>
+              <a:buChar char="•"/>
+            </a:pPr>
+            <a:r>
+              <a:rPr lang="en-US" sz="900" b="1" dirty="0">
+                <a:solidFill>
+                  <a:srgbClr val="1A1A1A"/>
+                </a:solidFill>
+                <a:latin typeface="Calibri" pitchFamily="34" charset="0"/>
+                <a:ea typeface="Calibri" pitchFamily="34" charset="-122"/>
+                <a:cs typeface="Calibri" pitchFamily="34" charset="-120"/>
+              </a:rPr>
+              <a:t>Working prototype, verified end-to-end in a browser.</a:t>
+            </a:r>
+            <a:endParaRPr lang="en-US" sz="900" dirty="0"/>
           </a:p>
         </p:txBody>
       </p:sp>
       <p:pic>
         <p:nvPicPr>
-          <p:cNvPr id="6" name="Image 0" descr="F:\SIH\deck\assets\architecture.png">    </p:cNvPr>
+          <p:cNvPr id="15" name="Image 0" descr="F:\SIH\deck\assets\architecture.png">    </p:cNvPr>
           <p:cNvPicPr>
             <a:picLocks noChangeAspect="1"/>
           </p:cNvPicPr>
@@ -2106,14 +3372,56 @@
         </p:blipFill>
         <p:spPr>
           <a:xfrm>
-            <a:off x="5440680" y="1600200"/>
-            <a:ext cx="6309360" cy="3549015"/>
+            <a:off x="3611880" y="822960"/>
+            <a:ext cx="5303520" cy="2983230"/>
           </a:xfrm>
           <a:prstGeom prst="rect">
             <a:avLst/>
           </a:prstGeom>
         </p:spPr>
       </p:pic>
+      <p:sp>
+        <p:nvSpPr>
+          <p:cNvPr id="16" name="Text 13"/>
+          <p:cNvSpPr txBox="1"/>
+          <p:nvPr/>
+        </p:nvSpPr>
+        <p:spPr>
+          <a:xfrm>
+            <a:off x="3611880" y="3858768"/>
+            <a:ext cx="5303520" cy="777240"/>
+          </a:xfrm>
+          <a:prstGeom prst="rect">
+            <a:avLst/>
+          </a:prstGeom>
+          <a:noFill/>
+          <a:ln/>
+        </p:spPr>
+        <p:txBody>
+          <a:bodyPr wrap="square" lIns="0" tIns="0" rIns="0" bIns="0" rtlCol="0" anchor="ctr"/>
+          <a:lstStyle/>
+          <a:p>
+            <a:pPr indent="0" marL="0">
+              <a:lnSpc>
+                <a:spcPts val="1000"/>
+              </a:lnSpc>
+              <a:buNone/>
+            </a:pPr>
+            <a:r>
+              <a:rPr lang="en-US" sz="750" dirty="0">
+                <a:solidFill>
+                  <a:srgbClr val="595959"/>
+                </a:solidFill>
+                <a:latin typeface="Consolas" pitchFamily="34" charset="0"/>
+                <a:ea typeface="Consolas" pitchFamily="34" charset="-122"/>
+                <a:cs typeface="Consolas" pitchFamily="34" charset="-120"/>
+              </a:rPr>
+              <a:t>page &gt; enumerate interactive elements + ARIA names &gt; compact text list &gt; model returns {id, confidence} &gt; on-device grounding score &gt; colour band &gt; draw dot &gt; human clicks &gt; wait for DOM to settle &gt; next step</a:t>
+            </a:r>
+            <a:endParaRPr lang="en-US" sz="750" dirty="0"/>
+          </a:p>
+        </p:txBody>
+      </p:sp>
     </p:spTree>
   </p:cSld>
   <p:clrMapOvr>
@@ -2141,42 +3449,28 @@
       </p:grpSpPr>
       <p:sp>
         <p:nvSpPr>
-          <p:cNvPr id="2" name="Text 0"/>
-          <p:cNvSpPr txBox="1"/>
-          <p:nvPr/>
-        </p:nvSpPr>
-        <p:spPr>
-          <a:xfrm>
-            <a:off x="548640" y="320040"/>
-            <a:ext cx="11064240" cy="274320"/>
-          </a:xfrm>
-          <a:prstGeom prst="rect">
-            <a:avLst/>
-          </a:prstGeom>
-          <a:noFill/>
-          <a:ln/>
-        </p:spPr>
-        <p:txBody>
-          <a:bodyPr wrap="square" lIns="0" tIns="0" rIns="0" bIns="0" rtlCol="0" anchor="ctr"/>
-          <a:lstStyle/>
-          <a:p>
-            <a:pPr indent="0" marL="0">
-              <a:buNone/>
-            </a:pPr>
-            <a:r>
-              <a:rPr lang="en-US" sz="1200" b="1" spc="150" kern="0" dirty="0">
-                <a:solidFill>
-                  <a:srgbClr val="4B5563"/>
-                </a:solidFill>
-                <a:latin typeface="Calibri" pitchFamily="34" charset="0"/>
-                <a:ea typeface="Calibri" pitchFamily="34" charset="-122"/>
-                <a:cs typeface="Calibri" pitchFamily="34" charset="-120"/>
-              </a:rPr>
-              <a:t>FEASIBILITY AND VIABILITY</a:t>
-            </a:r>
-            <a:endParaRPr lang="en-US" sz="1200" dirty="0"/>
-          </a:p>
-        </p:txBody>
+          <p:cNvPr id="2" name="Shape 0"/>
+          <p:cNvSpPr/>
+          <p:nvPr/>
+        </p:nvSpPr>
+        <p:spPr>
+          <a:xfrm>
+            <a:off x="164592" y="109728"/>
+            <a:ext cx="1234440" cy="566928"/>
+          </a:xfrm>
+          <a:prstGeom prst="ellipse">
+            <a:avLst/>
+          </a:prstGeom>
+          <a:solidFill>
+            <a:srgbClr val="FFFFFF"/>
+          </a:solidFill>
+          <a:ln w="15875">
+            <a:solidFill>
+              <a:srgbClr val="7C6BAF"/>
+            </a:solidFill>
+            <a:prstDash val="solid"/>
+          </a:ln>
+        </p:spPr>
       </p:sp>
       <p:sp>
         <p:nvSpPr>
@@ -2186,8 +3480,8 @@
         </p:nvSpPr>
         <p:spPr>
           <a:xfrm>
-            <a:off x="548640" y="603504"/>
-            <a:ext cx="11064240" cy="777240"/>
+            <a:off x="164592" y="109728"/>
+            <a:ext cx="1234440" cy="566928"/>
           </a:xfrm>
           <a:prstGeom prst="rect">
             <a:avLst/>
@@ -2199,21 +3493,21 @@
           <a:bodyPr wrap="square" lIns="0" tIns="0" rIns="0" bIns="0" rtlCol="0" anchor="ctr"/>
           <a:lstStyle/>
           <a:p>
-            <a:pPr indent="0" marL="0">
-              <a:buNone/>
-            </a:pPr>
-            <a:r>
-              <a:rPr lang="en-US" sz="3200" b="1" dirty="0">
-                <a:solidFill>
-                  <a:srgbClr val="111827"/>
-                </a:solidFill>
-                <a:latin typeface="Calibri" pitchFamily="34" charset="0"/>
-                <a:ea typeface="Calibri" pitchFamily="34" charset="-122"/>
-                <a:cs typeface="Calibri" pitchFamily="34" charset="-120"/>
-              </a:rPr>
-              <a:t>Working prototype today; risks named honestly</a:t>
-            </a:r>
-            <a:endParaRPr lang="en-US" sz="3200" dirty="0"/>
+            <a:pPr algn="ctr" indent="0" marL="0">
+              <a:buNone/>
+            </a:pPr>
+            <a:r>
+              <a:rPr lang="en-US" sz="1100" dirty="0">
+                <a:solidFill>
+                  <a:srgbClr val="1A1A1A"/>
+                </a:solidFill>
+                <a:latin typeface="Calibri" pitchFamily="34" charset="0"/>
+                <a:ea typeface="Calibri" pitchFamily="34" charset="-122"/>
+                <a:cs typeface="Calibri" pitchFamily="34" charset="-120"/>
+              </a:rPr>
+              <a:t>Code Blooded</a:t>
+            </a:r>
+            <a:endParaRPr lang="en-US" sz="1100" dirty="0"/>
           </a:p>
         </p:txBody>
       </p:sp>
@@ -2225,8 +3519,8 @@
         </p:nvSpPr>
         <p:spPr>
           <a:xfrm>
-            <a:off x="548640" y="1600200"/>
-            <a:ext cx="5577840" cy="2834640"/>
+            <a:off x="1463040" y="128016"/>
+            <a:ext cx="6126480" cy="530352"/>
           </a:xfrm>
           <a:prstGeom prst="rect">
             <a:avLst/>
@@ -2235,92 +3529,402 @@
           <a:ln/>
         </p:spPr>
         <p:txBody>
+          <a:bodyPr wrap="square" lIns="0" tIns="0" rIns="0" bIns="0" rtlCol="0" anchor="ctr"/>
+          <a:lstStyle/>
+          <a:p>
+            <a:pPr algn="ctr" indent="0" marL="0">
+              <a:buNone/>
+            </a:pPr>
+            <a:r>
+              <a:rPr lang="en-US" sz="2600" b="1" dirty="0">
+                <a:solidFill>
+                  <a:srgbClr val="1F3864"/>
+                </a:solidFill>
+                <a:latin typeface="Cambria" pitchFamily="34" charset="0"/>
+                <a:ea typeface="Cambria" pitchFamily="34" charset="-122"/>
+                <a:cs typeface="Cambria" pitchFamily="34" charset="-120"/>
+              </a:rPr>
+              <a:t>FEASIBILITY AND VIABILITY</a:t>
+            </a:r>
+            <a:endParaRPr lang="en-US" sz="2600" dirty="0"/>
+          </a:p>
+        </p:txBody>
+      </p:sp>
+      <p:sp>
+        <p:nvSpPr>
+          <p:cNvPr id="5" name="Text 3"/>
+          <p:cNvSpPr txBox="1"/>
+          <p:nvPr/>
+        </p:nvSpPr>
+        <p:spPr>
+          <a:xfrm>
+            <a:off x="7699248" y="128016"/>
+            <a:ext cx="1316736" cy="548640"/>
+          </a:xfrm>
+          <a:prstGeom prst="rect">
+            <a:avLst/>
+          </a:prstGeom>
+          <a:noFill/>
+          <a:ln w="9525">
+            <a:solidFill>
+              <a:srgbClr val="DDDDDD"/>
+            </a:solidFill>
+            <a:prstDash val="dash"/>
+          </a:ln>
+        </p:spPr>
+        <p:txBody>
+          <a:bodyPr wrap="square" lIns="0" tIns="0" rIns="0" bIns="0" rtlCol="0" anchor="ctr"/>
+          <a:lstStyle/>
+          <a:p>
+            <a:pPr algn="ctr" indent="0" marL="0">
+              <a:buNone/>
+            </a:pPr>
+            <a:r>
+              <a:rPr lang="en-US" sz="750" i="1" dirty="0">
+                <a:solidFill>
+                  <a:srgbClr val="AAAAAA"/>
+                </a:solidFill>
+                <a:latin typeface="Calibri" pitchFamily="34" charset="0"/>
+                <a:ea typeface="Calibri" pitchFamily="34" charset="-122"/>
+                <a:cs typeface="Calibri" pitchFamily="34" charset="-120"/>
+              </a:rPr>
+              <a:t>SIH 2026 logo</a:t>
+            </a:r>
+            <a:endParaRPr lang="en-US" sz="750" dirty="0"/>
+          </a:p>
+          <a:p>
+            <a:pPr algn="ctr" indent="0" marL="0">
+              <a:buNone/>
+            </a:pPr>
+            <a:r>
+              <a:rPr lang="en-US" sz="750" i="1" dirty="0">
+                <a:solidFill>
+                  <a:srgbClr val="AAAAAA"/>
+                </a:solidFill>
+                <a:latin typeface="Calibri" pitchFamily="34" charset="0"/>
+                <a:ea typeface="Calibri" pitchFamily="34" charset="-122"/>
+                <a:cs typeface="Calibri" pitchFamily="34" charset="-120"/>
+              </a:rPr>
+              <a:t>(from the official template)</a:t>
+            </a:r>
+            <a:endParaRPr lang="en-US" sz="750" dirty="0"/>
+          </a:p>
+        </p:txBody>
+      </p:sp>
+      <p:sp>
+        <p:nvSpPr>
+          <p:cNvPr id="6" name="Shape 4"/>
+          <p:cNvSpPr/>
+          <p:nvPr/>
+        </p:nvSpPr>
+        <p:spPr>
+          <a:xfrm>
+            <a:off x="0" y="4832604"/>
+            <a:ext cx="9144000" cy="310896"/>
+          </a:xfrm>
+          <a:prstGeom prst="rect">
+            <a:avLst/>
+          </a:prstGeom>
+          <a:solidFill>
+            <a:srgbClr val="1F7AC4"/>
+          </a:solidFill>
+          <a:ln/>
+        </p:spPr>
+      </p:sp>
+      <p:sp>
+        <p:nvSpPr>
+          <p:cNvPr id="7" name="Text 5"/>
+          <p:cNvSpPr txBox="1"/>
+          <p:nvPr/>
+        </p:nvSpPr>
+        <p:spPr>
+          <a:xfrm>
+            <a:off x="0" y="4832604"/>
+            <a:ext cx="9144000" cy="310896"/>
+          </a:xfrm>
+          <a:prstGeom prst="rect">
+            <a:avLst/>
+          </a:prstGeom>
+          <a:noFill/>
+          <a:ln/>
+        </p:spPr>
+        <p:txBody>
+          <a:bodyPr wrap="square" lIns="0" tIns="0" rIns="0" bIns="0" rtlCol="0" anchor="ctr"/>
+          <a:lstStyle/>
+          <a:p>
+            <a:pPr algn="ctr" indent="0" marL="0">
+              <a:buNone/>
+            </a:pPr>
+            <a:r>
+              <a:rPr lang="en-US" sz="1000" dirty="0">
+                <a:solidFill>
+                  <a:srgbClr val="FFFFFF"/>
+                </a:solidFill>
+                <a:latin typeface="Calibri" pitchFamily="34" charset="0"/>
+                <a:ea typeface="Calibri" pitchFamily="34" charset="-122"/>
+                <a:cs typeface="Calibri" pitchFamily="34" charset="-120"/>
+              </a:rPr>
+              <a:t>@SIH Idea submission- Template</a:t>
+            </a:r>
+            <a:endParaRPr lang="en-US" sz="1000" dirty="0"/>
+          </a:p>
+        </p:txBody>
+      </p:sp>
+      <p:sp>
+        <p:nvSpPr>
+          <p:cNvPr id="8" name="Text 6"/>
+          <p:cNvSpPr txBox="1"/>
+          <p:nvPr/>
+        </p:nvSpPr>
+        <p:spPr>
+          <a:xfrm>
+            <a:off x="8595360" y="4832604"/>
+            <a:ext cx="365760" cy="310896"/>
+          </a:xfrm>
+          <a:prstGeom prst="rect">
+            <a:avLst/>
+          </a:prstGeom>
+          <a:noFill/>
+          <a:ln/>
+        </p:spPr>
+        <p:txBody>
+          <a:bodyPr wrap="square" lIns="0" tIns="0" rIns="0" bIns="0" rtlCol="0" anchor="ctr"/>
+          <a:lstStyle/>
+          <a:p>
+            <a:pPr algn="r" indent="0" marL="0">
+              <a:buNone/>
+            </a:pPr>
+            <a:r>
+              <a:rPr lang="en-US" sz="1000" b="1" dirty="0">
+                <a:solidFill>
+                  <a:srgbClr val="FFFFFF"/>
+                </a:solidFill>
+                <a:latin typeface="Calibri" pitchFamily="34" charset="0"/>
+                <a:ea typeface="Calibri" pitchFamily="34" charset="-122"/>
+                <a:cs typeface="Calibri" pitchFamily="34" charset="-120"/>
+              </a:rPr>
+              <a:t>4</a:t>
+            </a:r>
+            <a:endParaRPr lang="en-US" sz="1000" dirty="0"/>
+          </a:p>
+        </p:txBody>
+      </p:sp>
+      <p:sp>
+        <p:nvSpPr>
+          <p:cNvPr id="9" name="Shape 7"/>
+          <p:cNvSpPr/>
+          <p:nvPr/>
+        </p:nvSpPr>
+        <p:spPr>
+          <a:xfrm>
+            <a:off x="256032" y="804672"/>
+            <a:ext cx="2834640" cy="1920240"/>
+          </a:xfrm>
+          <a:prstGeom prst="rect">
+            <a:avLst/>
+          </a:prstGeom>
+          <a:solidFill>
+            <a:srgbClr val="FFFFFF"/>
+          </a:solidFill>
+          <a:ln w="12700">
+            <a:solidFill>
+              <a:srgbClr val="4A7EBB"/>
+            </a:solidFill>
+            <a:prstDash val="solid"/>
+          </a:ln>
+        </p:spPr>
+      </p:sp>
+      <p:sp>
+        <p:nvSpPr>
+          <p:cNvPr id="10" name="Text 8"/>
+          <p:cNvSpPr txBox="1"/>
+          <p:nvPr/>
+        </p:nvSpPr>
+        <p:spPr>
+          <a:xfrm>
+            <a:off x="365760" y="868680"/>
+            <a:ext cx="2615184" cy="237744"/>
+          </a:xfrm>
+          <a:prstGeom prst="rect">
+            <a:avLst/>
+          </a:prstGeom>
+          <a:noFill/>
+          <a:ln/>
+        </p:spPr>
+        <p:txBody>
+          <a:bodyPr wrap="square" lIns="0" tIns="0" rIns="0" bIns="0" rtlCol="0" anchor="ctr"/>
+          <a:lstStyle/>
+          <a:p>
+            <a:pPr indent="0" marL="0">
+              <a:buNone/>
+            </a:pPr>
+            <a:r>
+              <a:rPr lang="en-US" sz="1000" b="1" dirty="0">
+                <a:solidFill>
+                  <a:srgbClr val="2E74B5"/>
+                </a:solidFill>
+                <a:latin typeface="Calibri" pitchFamily="34" charset="0"/>
+                <a:ea typeface="Calibri" pitchFamily="34" charset="-122"/>
+                <a:cs typeface="Calibri" pitchFamily="34" charset="-120"/>
+              </a:rPr>
+              <a:t>Analysis of the feasibility of the idea</a:t>
+            </a:r>
+            <a:endParaRPr lang="en-US" sz="1000" dirty="0"/>
+          </a:p>
+        </p:txBody>
+      </p:sp>
+      <p:sp>
+        <p:nvSpPr>
+          <p:cNvPr id="11" name="Text 9"/>
+          <p:cNvSpPr txBox="1"/>
+          <p:nvPr/>
+        </p:nvSpPr>
+        <p:spPr>
+          <a:xfrm>
+            <a:off x="384048" y="1115568"/>
+            <a:ext cx="2578608" cy="1517904"/>
+          </a:xfrm>
+          <a:prstGeom prst="rect">
+            <a:avLst/>
+          </a:prstGeom>
+          <a:noFill/>
+          <a:ln/>
+        </p:spPr>
+        <p:txBody>
           <a:bodyPr wrap="square" lIns="0" tIns="0" rIns="0" bIns="0" rtlCol="0" anchor="t"/>
           <a:lstStyle/>
           <a:p>
+            <a:pPr indent="0" marL="0">
+              <a:lnSpc>
+                <a:spcPts val="1300"/>
+              </a:lnSpc>
+              <a:spcAft>
+                <a:spcPts val="500"/>
+              </a:spcAft>
+              <a:buNone/>
+            </a:pPr>
+            <a:r>
+              <a:rPr lang="en-US" sz="850" dirty="0">
+                <a:solidFill>
+                  <a:srgbClr val="1A1A1A"/>
+                </a:solidFill>
+                <a:latin typeface="Calibri" pitchFamily="34" charset="0"/>
+                <a:ea typeface="Calibri" pitchFamily="34" charset="-122"/>
+                <a:cs typeface="Calibri" pitchFamily="34" charset="-120"/>
+              </a:rPr>
+              <a:t>Technical, Financial, Market, Operational</a:t>
+            </a:r>
+            <a:endParaRPr lang="en-US" sz="850" dirty="0"/>
+          </a:p>
+          <a:p>
             <a:pPr marL="342900" indent="-342900">
               <a:lnSpc>
-                <a:spcPts val="2200"/>
+                <a:spcPts val="1300"/>
               </a:lnSpc>
               <a:spcAft>
-                <a:spcPts val="1000"/>
+                <a:spcPts val="500"/>
               </a:spcAft>
               <a:buSzPct val="100000"/>
               <a:buChar char="•"/>
             </a:pPr>
             <a:r>
-              <a:rPr lang="en-US" sz="1500" dirty="0">
-                <a:solidFill>
-                  <a:srgbClr val="111827"/>
-                </a:solidFill>
-                <a:latin typeface="Calibri" pitchFamily="34" charset="0"/>
-                <a:ea typeface="Calibri" pitchFamily="34" charset="-122"/>
-                <a:cs typeface="Calibri" pitchFamily="34" charset="-120"/>
-              </a:rPr>
-              <a:t>Built and verified in a browser: live grounding, colour bands, contingent fading, on-page ask bar, screen share with a real pause, offline mode.</a:t>
-            </a:r>
-            <a:endParaRPr lang="en-US" sz="1500" dirty="0"/>
+              <a:rPr lang="en-US" sz="850" dirty="0">
+                <a:solidFill>
+                  <a:srgbClr val="1A1A1A"/>
+                </a:solidFill>
+                <a:latin typeface="Calibri" pitchFamily="34" charset="0"/>
+                <a:ea typeface="Calibri" pitchFamily="34" charset="-122"/>
+                <a:cs typeface="Calibri" pitchFamily="34" charset="-120"/>
+              </a:rPr>
+              <a:t>Technical: built and running today; DOM + ARIA works on portals we do not control.</a:t>
+            </a:r>
+            <a:endParaRPr lang="en-US" sz="850" dirty="0"/>
           </a:p>
           <a:p>
             <a:pPr marL="342900" indent="-342900">
               <a:lnSpc>
-                <a:spcPts val="2200"/>
+                <a:spcPts val="1300"/>
               </a:lnSpc>
               <a:spcAft>
-                <a:spcPts val="1000"/>
+                <a:spcPts val="500"/>
               </a:spcAft>
               <a:buSzPct val="100000"/>
               <a:buChar char="•"/>
             </a:pPr>
             <a:r>
-              <a:rPr lang="en-US" sz="1500" dirty="0">
-                <a:solidFill>
-                  <a:srgbClr val="111827"/>
-                </a:solidFill>
-                <a:latin typeface="Calibri" pitchFamily="34" charset="0"/>
-                <a:ea typeface="Calibri" pitchFamily="34" charset="-122"/>
-                <a:cs typeface="Calibri" pitchFamily="34" charset="-120"/>
-              </a:rPr>
-              <a:t>Unlabelled controls? The page score drops and the dot goes red - it never guesses silently.</a:t>
-            </a:r>
-            <a:endParaRPr lang="en-US" sz="1500" dirty="0"/>
+              <a:rPr lang="en-US" sz="850" dirty="0">
+                <a:solidFill>
+                  <a:srgbClr val="1A1A1A"/>
+                </a:solidFill>
+                <a:latin typeface="Calibri" pitchFamily="34" charset="0"/>
+                <a:ea typeface="Calibri" pitchFamily="34" charset="-122"/>
+                <a:cs typeface="Calibri" pitchFamily="34" charset="-120"/>
+              </a:rPr>
+              <a:t>Financial: a compact text request per step on a free-tier model; local model = zero.</a:t>
+            </a:r>
+            <a:endParaRPr lang="en-US" sz="850" dirty="0"/>
           </a:p>
           <a:p>
             <a:pPr marL="342900" indent="-342900">
               <a:lnSpc>
-                <a:spcPts val="2200"/>
+                <a:spcPts val="1300"/>
               </a:lnSpc>
               <a:spcAft>
-                <a:spcPts val="1000"/>
+                <a:spcPts val="500"/>
               </a:spcAft>
               <a:buSzPct val="100000"/>
               <a:buChar char="•"/>
             </a:pPr>
             <a:r>
-              <a:rPr lang="en-US" sz="1500" dirty="0">
-                <a:solidFill>
-                  <a:srgbClr val="111827"/>
-                </a:solidFill>
-                <a:latin typeface="Calibri" pitchFamily="34" charset="0"/>
-                <a:ea typeface="Calibri" pitchFamily="34" charset="-122"/>
-                <a:cs typeface="Calibri" pitchFamily="34" charset="-120"/>
-              </a:rPr>
-              <a:t>Portal redesigned? Nothing is pre-scripted; it re-grounds on every step.</a:t>
-            </a:r>
-            <a:endParaRPr lang="en-US" sz="1500" dirty="0"/>
-          </a:p>
-        </p:txBody>
-      </p:sp>
-      <p:sp>
-        <p:nvSpPr>
-          <p:cNvPr id="5" name="Text 3"/>
+              <a:rPr lang="en-US" sz="850" dirty="0">
+                <a:solidFill>
+                  <a:srgbClr val="1A1A1A"/>
+                </a:solidFill>
+                <a:latin typeface="Calibri" pitchFamily="34" charset="0"/>
+                <a:ea typeface="Calibri" pitchFamily="34" charset="-122"/>
+                <a:cs typeface="Calibri" pitchFamily="34" charset="-120"/>
+              </a:rPr>
+              <a:t>Operational: installs as an extension. No ministry integration, no portal changes.</a:t>
+            </a:r>
+            <a:endParaRPr lang="en-US" sz="850" dirty="0"/>
+          </a:p>
+        </p:txBody>
+      </p:sp>
+      <p:sp>
+        <p:nvSpPr>
+          <p:cNvPr id="12" name="Shape 10"/>
+          <p:cNvSpPr/>
+          <p:nvPr/>
+        </p:nvSpPr>
+        <p:spPr>
+          <a:xfrm>
+            <a:off x="3182112" y="804672"/>
+            <a:ext cx="2834640" cy="1920240"/>
+          </a:xfrm>
+          <a:prstGeom prst="rect">
+            <a:avLst/>
+          </a:prstGeom>
+          <a:solidFill>
+            <a:srgbClr val="FFFFFF"/>
+          </a:solidFill>
+          <a:ln w="12700">
+            <a:solidFill>
+              <a:srgbClr val="4A7EBB"/>
+            </a:solidFill>
+            <a:prstDash val="solid"/>
+          </a:ln>
+        </p:spPr>
+      </p:sp>
+      <p:sp>
+        <p:nvSpPr>
+          <p:cNvPr id="13" name="Text 11"/>
           <p:cNvSpPr txBox="1"/>
           <p:nvPr/>
         </p:nvSpPr>
         <p:spPr>
           <a:xfrm>
-            <a:off x="548640" y="4526280"/>
-            <a:ext cx="5577840" cy="960120"/>
+            <a:off x="3291840" y="868680"/>
+            <a:ext cx="2615184" cy="237744"/>
           </a:xfrm>
           <a:prstGeom prst="rect">
             <a:avLst/>
@@ -2333,53 +3937,199 @@
           <a:lstStyle/>
           <a:p>
             <a:pPr indent="0" marL="0">
-              <a:lnSpc>
-                <a:spcPts val="1600"/>
-              </a:lnSpc>
-              <a:buNone/>
-            </a:pPr>
-            <a:r>
-              <a:rPr lang="en-US" sz="1200" b="1" dirty="0">
-                <a:solidFill>
-                  <a:srgbClr val="111827"/>
-                </a:solidFill>
-                <a:latin typeface="Calibri" pitchFamily="34" charset="0"/>
-                <a:ea typeface="Calibri" pitchFamily="34" charset="-122"/>
-                <a:cs typeface="Calibri" pitchFamily="34" charset="-120"/>
-              </a:rPr>
-              <a:t>Measured run: </a:t>
-            </a:r>
+              <a:buNone/>
+            </a:pPr>
+            <a:r>
+              <a:rPr lang="en-US" sz="1000" b="1" dirty="0">
+                <a:solidFill>
+                  <a:srgbClr val="2E74B5"/>
+                </a:solidFill>
+                <a:latin typeface="Calibri" pitchFamily="34" charset="0"/>
+                <a:ea typeface="Calibri" pitchFamily="34" charset="-122"/>
+                <a:cs typeface="Calibri" pitchFamily="34" charset="-120"/>
+              </a:rPr>
+              <a:t>Potential challenges and risks</a:t>
+            </a:r>
+            <a:endParaRPr lang="en-US" sz="1000" dirty="0"/>
+          </a:p>
+        </p:txBody>
+      </p:sp>
+      <p:sp>
+        <p:nvSpPr>
+          <p:cNvPr id="14" name="Text 12"/>
+          <p:cNvSpPr txBox="1"/>
+          <p:nvPr/>
+        </p:nvSpPr>
+        <p:spPr>
+          <a:xfrm>
+            <a:off x="3310128" y="1115568"/>
+            <a:ext cx="2578608" cy="1517904"/>
+          </a:xfrm>
+          <a:prstGeom prst="rect">
+            <a:avLst/>
+          </a:prstGeom>
+          <a:noFill/>
+          <a:ln/>
+        </p:spPr>
+        <p:txBody>
+          <a:bodyPr wrap="square" lIns="0" tIns="0" rIns="0" bIns="0" rtlCol="0" anchor="t"/>
+          <a:lstStyle/>
+          <a:p>
             <a:pPr indent="0" marL="0">
               <a:lnSpc>
-                <a:spcPts val="1600"/>
-              </a:lnSpc>
-              <a:buNone/>
-            </a:pPr>
-            <a:r>
-              <a:rPr lang="en-US" sz="1200" dirty="0">
-                <a:solidFill>
-                  <a:srgbClr val="111827"/>
-                </a:solidFill>
-                <a:latin typeface="Calibri" pitchFamily="34" charset="0"/>
-                <a:ea typeface="Calibri" pitchFamily="34" charset="-122"/>
-                <a:cs typeface="Calibri" pitchFamily="34" charset="-120"/>
-              </a:rPr>
-              <a:t>"i want to take my money out" produced 64% &gt; 57% &gt; 51% RED &gt; 75%. The amount field scored 0.815 and the confirm button 0.763 - a win by 0.052 is reported as a win by 0.052.</a:t>
-            </a:r>
-            <a:endParaRPr lang="en-US" sz="1200" dirty="0"/>
-          </a:p>
-        </p:txBody>
-      </p:sp>
-      <p:sp>
-        <p:nvSpPr>
-          <p:cNvPr id="6" name="Text 4"/>
+                <a:spcPts val="1300"/>
+              </a:lnSpc>
+              <a:spcAft>
+                <a:spcPts val="500"/>
+              </a:spcAft>
+              <a:buNone/>
+            </a:pPr>
+            <a:r>
+              <a:rPr lang="en-US" sz="850" dirty="0">
+                <a:solidFill>
+                  <a:srgbClr val="1A1A1A"/>
+                </a:solidFill>
+                <a:latin typeface="Calibri" pitchFamily="34" charset="0"/>
+                <a:ea typeface="Calibri" pitchFamily="34" charset="-122"/>
+                <a:cs typeface="Calibri" pitchFamily="34" charset="-120"/>
+              </a:rPr>
+              <a:t>Technical, Financial, Market, Operational</a:t>
+            </a:r>
+            <a:endParaRPr lang="en-US" sz="850" dirty="0"/>
+          </a:p>
+          <a:p>
+            <a:pPr marL="342900" indent="-342900">
+              <a:lnSpc>
+                <a:spcPts val="1300"/>
+              </a:lnSpc>
+              <a:spcAft>
+                <a:spcPts val="500"/>
+              </a:spcAft>
+              <a:buSzPct val="100000"/>
+              <a:buChar char="•"/>
+            </a:pPr>
+            <a:r>
+              <a:rPr lang="en-US" sz="850" dirty="0">
+                <a:solidFill>
+                  <a:srgbClr val="1A1A1A"/>
+                </a:solidFill>
+                <a:latin typeface="Calibri" pitchFamily="34" charset="0"/>
+                <a:ea typeface="Calibri" pitchFamily="34" charset="-122"/>
+                <a:cs typeface="Calibri" pitchFamily="34" charset="-120"/>
+              </a:rPr>
+              <a:t>Unlabelled / icon-only controls - our weakest case.</a:t>
+            </a:r>
+            <a:endParaRPr lang="en-US" sz="850" dirty="0"/>
+          </a:p>
+          <a:p>
+            <a:pPr marL="342900" indent="-342900">
+              <a:lnSpc>
+                <a:spcPts val="1300"/>
+              </a:lnSpc>
+              <a:spcAft>
+                <a:spcPts val="500"/>
+              </a:spcAft>
+              <a:buSzPct val="100000"/>
+              <a:buChar char="•"/>
+            </a:pPr>
+            <a:r>
+              <a:rPr lang="en-US" sz="850" dirty="0">
+                <a:solidFill>
+                  <a:srgbClr val="1A1A1A"/>
+                </a:solidFill>
+                <a:latin typeface="Calibri" pitchFamily="34" charset="0"/>
+                <a:ea typeface="Calibri" pitchFamily="34" charset="-122"/>
+                <a:cs typeface="Calibri" pitchFamily="34" charset="-120"/>
+              </a:rPr>
+              <a:t>Model picks the wrong element.</a:t>
+            </a:r>
+            <a:endParaRPr lang="en-US" sz="850" dirty="0"/>
+          </a:p>
+          <a:p>
+            <a:pPr marL="342900" indent="-342900">
+              <a:lnSpc>
+                <a:spcPts val="1300"/>
+              </a:lnSpc>
+              <a:spcAft>
+                <a:spcPts val="500"/>
+              </a:spcAft>
+              <a:buSzPct val="100000"/>
+              <a:buChar char="•"/>
+            </a:pPr>
+            <a:r>
+              <a:rPr lang="en-US" sz="850" dirty="0">
+                <a:solidFill>
+                  <a:srgbClr val="1A1A1A"/>
+                </a:solidFill>
+                <a:latin typeface="Calibri" pitchFamily="34" charset="0"/>
+                <a:ea typeface="Calibri" pitchFamily="34" charset="-122"/>
+                <a:cs typeface="Calibri" pitchFamily="34" charset="-120"/>
+              </a:rPr>
+              <a:t>Trust: users may over-rely on a confident-looking dot.</a:t>
+            </a:r>
+            <a:endParaRPr lang="en-US" sz="850" dirty="0"/>
+          </a:p>
+          <a:p>
+            <a:pPr marL="342900" indent="-342900">
+              <a:lnSpc>
+                <a:spcPts val="1300"/>
+              </a:lnSpc>
+              <a:spcAft>
+                <a:spcPts val="500"/>
+              </a:spcAft>
+              <a:buSzPct val="100000"/>
+              <a:buChar char="•"/>
+            </a:pPr>
+            <a:r>
+              <a:rPr lang="en-US" sz="850" dirty="0">
+                <a:solidFill>
+                  <a:srgbClr val="1A1A1A"/>
+                </a:solidFill>
+                <a:latin typeface="Calibri" pitchFamily="34" charset="0"/>
+                <a:ea typeface="Calibri" pitchFamily="34" charset="-122"/>
+                <a:cs typeface="Calibri" pitchFamily="34" charset="-120"/>
+              </a:rPr>
+              <a:t>Market: Copilot Vision already points at things.</a:t>
+            </a:r>
+            <a:endParaRPr lang="en-US" sz="850" dirty="0"/>
+          </a:p>
+        </p:txBody>
+      </p:sp>
+      <p:sp>
+        <p:nvSpPr>
+          <p:cNvPr id="15" name="Shape 13"/>
+          <p:cNvSpPr/>
+          <p:nvPr/>
+        </p:nvSpPr>
+        <p:spPr>
+          <a:xfrm>
+            <a:off x="6108192" y="804672"/>
+            <a:ext cx="2779776" cy="1920240"/>
+          </a:xfrm>
+          <a:prstGeom prst="rect">
+            <a:avLst/>
+          </a:prstGeom>
+          <a:solidFill>
+            <a:srgbClr val="FFFFFF"/>
+          </a:solidFill>
+          <a:ln w="12700">
+            <a:solidFill>
+              <a:srgbClr val="4A7EBB"/>
+            </a:solidFill>
+            <a:prstDash val="solid"/>
+          </a:ln>
+        </p:spPr>
+      </p:sp>
+      <p:sp>
+        <p:nvSpPr>
+          <p:cNvPr id="16" name="Text 14"/>
           <p:cNvSpPr txBox="1"/>
           <p:nvPr/>
         </p:nvSpPr>
         <p:spPr>
           <a:xfrm>
-            <a:off x="548640" y="5532120"/>
-            <a:ext cx="5577840" cy="777240"/>
+            <a:off x="6217920" y="868680"/>
+            <a:ext cx="2560320" cy="237744"/>
           </a:xfrm>
           <a:prstGeom prst="rect">
             <a:avLst/>
@@ -2392,29 +4142,143 @@
           <a:lstStyle/>
           <a:p>
             <a:pPr indent="0" marL="0">
-              <a:lnSpc>
-                <a:spcPts val="1500"/>
-              </a:lnSpc>
-              <a:buNone/>
-            </a:pPr>
-            <a:r>
-              <a:rPr lang="en-US" sz="1150" i="1" dirty="0">
-                <a:solidFill>
-                  <a:srgbClr val="B42318"/>
-                </a:solidFill>
-                <a:latin typeface="Calibri" pitchFamily="34" charset="0"/>
-                <a:ea typeface="Calibri" pitchFamily="34" charset="-122"/>
-                <a:cs typeface="Calibri" pitchFamily="34" charset="-120"/>
-              </a:rPr>
-              <a:t>That run used the offline matcher with no model, which is capped below green by design. We have not yet recorded a green dot on stage, and we have not measured accuracy.</a:t>
-            </a:r>
-            <a:endParaRPr lang="en-US" sz="1150" dirty="0"/>
+              <a:buNone/>
+            </a:pPr>
+            <a:r>
+              <a:rPr lang="en-US" sz="1000" b="1" dirty="0">
+                <a:solidFill>
+                  <a:srgbClr val="2E74B5"/>
+                </a:solidFill>
+                <a:latin typeface="Calibri" pitchFamily="34" charset="0"/>
+                <a:ea typeface="Calibri" pitchFamily="34" charset="-122"/>
+                <a:cs typeface="Calibri" pitchFamily="34" charset="-120"/>
+              </a:rPr>
+              <a:t>Strategies for overcoming these challenges</a:t>
+            </a:r>
+            <a:endParaRPr lang="en-US" sz="1000" dirty="0"/>
+          </a:p>
+        </p:txBody>
+      </p:sp>
+      <p:sp>
+        <p:nvSpPr>
+          <p:cNvPr id="17" name="Text 15"/>
+          <p:cNvSpPr txBox="1"/>
+          <p:nvPr/>
+        </p:nvSpPr>
+        <p:spPr>
+          <a:xfrm>
+            <a:off x="6236208" y="1115568"/>
+            <a:ext cx="2523744" cy="1517904"/>
+          </a:xfrm>
+          <a:prstGeom prst="rect">
+            <a:avLst/>
+          </a:prstGeom>
+          <a:noFill/>
+          <a:ln/>
+        </p:spPr>
+        <p:txBody>
+          <a:bodyPr wrap="square" lIns="0" tIns="0" rIns="0" bIns="0" rtlCol="0" anchor="t"/>
+          <a:lstStyle/>
+          <a:p>
+            <a:pPr indent="0" marL="0">
+              <a:lnSpc>
+                <a:spcPts val="1300"/>
+              </a:lnSpc>
+              <a:spcAft>
+                <a:spcPts val="500"/>
+              </a:spcAft>
+              <a:buNone/>
+            </a:pPr>
+            <a:r>
+              <a:rPr lang="en-US" sz="850" dirty="0">
+                <a:solidFill>
+                  <a:srgbClr val="1A1A1A"/>
+                </a:solidFill>
+                <a:latin typeface="Calibri" pitchFamily="34" charset="0"/>
+                <a:ea typeface="Calibri" pitchFamily="34" charset="-122"/>
+                <a:cs typeface="Calibri" pitchFamily="34" charset="-120"/>
+              </a:rPr>
+              <a:t>Methods, principle, Strategies, Algorithms</a:t>
+            </a:r>
+            <a:endParaRPr lang="en-US" sz="850" dirty="0"/>
+          </a:p>
+          <a:p>
+            <a:pPr marL="342900" indent="-342900">
+              <a:lnSpc>
+                <a:spcPts val="1300"/>
+              </a:lnSpc>
+              <a:spcAft>
+                <a:spcPts val="500"/>
+              </a:spcAft>
+              <a:buSzPct val="100000"/>
+              <a:buChar char="•"/>
+            </a:pPr>
+            <a:r>
+              <a:rPr lang="en-US" sz="850" dirty="0">
+                <a:solidFill>
+                  <a:srgbClr val="1A1A1A"/>
+                </a:solidFill>
+                <a:latin typeface="Calibri" pitchFamily="34" charset="0"/>
+                <a:ea typeface="Calibri" pitchFamily="34" charset="-122"/>
+                <a:cs typeface="Calibri" pitchFamily="34" charset="-120"/>
+              </a:rPr>
+              <a:t>Unlabelled controls drop the page score, so the dot goes red - never a silent guess; vision grounding is the fallback.</a:t>
+            </a:r>
+            <a:endParaRPr lang="en-US" sz="850" dirty="0"/>
+          </a:p>
+          <a:p>
+            <a:pPr marL="342900" indent="-342900">
+              <a:lnSpc>
+                <a:spcPts val="1300"/>
+              </a:lnSpc>
+              <a:spcAft>
+                <a:spcPts val="500"/>
+              </a:spcAft>
+              <a:buSzPct val="100000"/>
+              <a:buChar char="•"/>
+            </a:pPr>
+            <a:r>
+              <a:rPr lang="en-US" sz="850" dirty="0">
+                <a:solidFill>
+                  <a:srgbClr val="1A1A1A"/>
+                </a:solidFill>
+                <a:latin typeface="Calibri" pitchFamily="34" charset="0"/>
+                <a:ea typeface="Calibri" pitchFamily="34" charset="-122"/>
+                <a:cs typeface="Calibri" pitchFamily="34" charset="-120"/>
+              </a:rPr>
+              <a:t>A wrong pick costs a glance, not a transaction - the human always clicks.</a:t>
+            </a:r>
+            <a:endParaRPr lang="en-US" sz="850" dirty="0"/>
+          </a:p>
+          <a:p>
+            <a:pPr marL="342900" indent="-342900">
+              <a:lnSpc>
+                <a:spcPts val="1300"/>
+              </a:lnSpc>
+              <a:spcAft>
+                <a:spcPts val="500"/>
+              </a:spcAft>
+              <a:buSzPct val="100000"/>
+              <a:buChar char="•"/>
+            </a:pPr>
+            <a:r>
+              <a:rPr lang="en-US" sz="850" dirty="0">
+                <a:solidFill>
+                  <a:srgbClr val="1A1A1A"/>
+                </a:solidFill>
+                <a:latin typeface="Calibri" pitchFamily="34" charset="0"/>
+                <a:ea typeface="Calibri" pitchFamily="34" charset="-122"/>
+                <a:cs typeface="Calibri" pitchFamily="34" charset="-120"/>
+              </a:rPr>
+              <a:t>Over-reliance is answered by the fade itself.</a:t>
+            </a:r>
+            <a:endParaRPr lang="en-US" sz="850" dirty="0"/>
           </a:p>
         </p:txBody>
       </p:sp>
       <p:pic>
         <p:nvPicPr>
-          <p:cNvPr id="7" name="Image 0" descr="F:\SIH\deck\assets\explainer-red-case.png">    </p:cNvPr>
+          <p:cNvPr id="18" name="Image 0" descr="F:\SIH\deck\assets\explainer-red-case.png">    </p:cNvPr>
           <p:cNvPicPr>
             <a:picLocks noChangeAspect="1"/>
           </p:cNvPicPr>
@@ -2428,14 +4292,115 @@
         </p:blipFill>
         <p:spPr>
           <a:xfrm>
-            <a:off x="6309360" y="1600200"/>
-            <a:ext cx="5486400" cy="3086100"/>
+            <a:off x="256032" y="2907792"/>
+            <a:ext cx="2926080" cy="1645920"/>
           </a:xfrm>
           <a:prstGeom prst="rect">
             <a:avLst/>
           </a:prstGeom>
         </p:spPr>
       </p:pic>
+      <p:sp>
+        <p:nvSpPr>
+          <p:cNvPr id="19" name="Text 16"/>
+          <p:cNvSpPr txBox="1"/>
+          <p:nvPr/>
+        </p:nvSpPr>
+        <p:spPr>
+          <a:xfrm>
+            <a:off x="3337560" y="2944368"/>
+            <a:ext cx="5550408" cy="731520"/>
+          </a:xfrm>
+          <a:prstGeom prst="rect">
+            <a:avLst/>
+          </a:prstGeom>
+          <a:noFill/>
+          <a:ln/>
+        </p:spPr>
+        <p:txBody>
+          <a:bodyPr wrap="square" lIns="0" tIns="0" rIns="0" bIns="0" rtlCol="0" anchor="ctr"/>
+          <a:lstStyle/>
+          <a:p>
+            <a:pPr indent="0" marL="0">
+              <a:lnSpc>
+                <a:spcPts val="1200"/>
+              </a:lnSpc>
+              <a:buNone/>
+            </a:pPr>
+            <a:r>
+              <a:rPr lang="en-US" sz="900" b="1" dirty="0">
+                <a:solidFill>
+                  <a:srgbClr val="1A1A1A"/>
+                </a:solidFill>
+                <a:latin typeface="Calibri" pitchFamily="34" charset="0"/>
+                <a:ea typeface="Calibri" pitchFamily="34" charset="-122"/>
+                <a:cs typeface="Calibri" pitchFamily="34" charset="-120"/>
+              </a:rPr>
+              <a:t>Measured run: </a:t>
+            </a:r>
+            <a:pPr indent="0" marL="0">
+              <a:lnSpc>
+                <a:spcPts val="1200"/>
+              </a:lnSpc>
+              <a:buNone/>
+            </a:pPr>
+            <a:r>
+              <a:rPr lang="en-US" sz="900" dirty="0">
+                <a:solidFill>
+                  <a:srgbClr val="1A1A1A"/>
+                </a:solidFill>
+                <a:latin typeface="Calibri" pitchFamily="34" charset="0"/>
+                <a:ea typeface="Calibri" pitchFamily="34" charset="-122"/>
+                <a:cs typeface="Calibri" pitchFamily="34" charset="-120"/>
+              </a:rPr>
+              <a:t>"i want to take my money out" produced 64% &gt; 57% &gt; 51% RED &gt; 75% on our practice portal. The amount field scored 0.815 and the confirm button 0.763 - a win by 0.052 is reported as a win by 0.052.</a:t>
+            </a:r>
+            <a:endParaRPr lang="en-US" sz="900" dirty="0"/>
+          </a:p>
+        </p:txBody>
+      </p:sp>
+      <p:sp>
+        <p:nvSpPr>
+          <p:cNvPr id="20" name="Text 17"/>
+          <p:cNvSpPr txBox="1"/>
+          <p:nvPr/>
+        </p:nvSpPr>
+        <p:spPr>
+          <a:xfrm>
+            <a:off x="3337560" y="3749040"/>
+            <a:ext cx="5550408" cy="640080"/>
+          </a:xfrm>
+          <a:prstGeom prst="rect">
+            <a:avLst/>
+          </a:prstGeom>
+          <a:noFill/>
+          <a:ln/>
+        </p:spPr>
+        <p:txBody>
+          <a:bodyPr wrap="square" lIns="0" tIns="0" rIns="0" bIns="0" rtlCol="0" anchor="ctr"/>
+          <a:lstStyle/>
+          <a:p>
+            <a:pPr indent="0" marL="0">
+              <a:lnSpc>
+                <a:spcPts val="1100"/>
+              </a:lnSpc>
+              <a:buNone/>
+            </a:pPr>
+            <a:r>
+              <a:rPr lang="en-US" sz="850" i="1" dirty="0">
+                <a:solidFill>
+                  <a:srgbClr val="B42318"/>
+                </a:solidFill>
+                <a:latin typeface="Calibri" pitchFamily="34" charset="0"/>
+                <a:ea typeface="Calibri" pitchFamily="34" charset="-122"/>
+                <a:cs typeface="Calibri" pitchFamily="34" charset="-120"/>
+              </a:rPr>
+              <a:t>That run used the offline matcher with no model, which is capped below green by design. We have not yet recorded a green dot on stage, and we have not measured accuracy.</a:t>
+            </a:r>
+            <a:endParaRPr lang="en-US" sz="850" dirty="0"/>
+          </a:p>
+        </p:txBody>
+      </p:sp>
     </p:spTree>
   </p:cSld>
   <p:clrMapOvr>
@@ -2463,42 +4428,28 @@
       </p:grpSpPr>
       <p:sp>
         <p:nvSpPr>
-          <p:cNvPr id="2" name="Text 0"/>
-          <p:cNvSpPr txBox="1"/>
-          <p:nvPr/>
-        </p:nvSpPr>
-        <p:spPr>
-          <a:xfrm>
-            <a:off x="548640" y="320040"/>
-            <a:ext cx="11064240" cy="274320"/>
-          </a:xfrm>
-          <a:prstGeom prst="rect">
-            <a:avLst/>
-          </a:prstGeom>
-          <a:noFill/>
-          <a:ln/>
-        </p:spPr>
-        <p:txBody>
-          <a:bodyPr wrap="square" lIns="0" tIns="0" rIns="0" bIns="0" rtlCol="0" anchor="ctr"/>
-          <a:lstStyle/>
-          <a:p>
-            <a:pPr indent="0" marL="0">
-              <a:buNone/>
-            </a:pPr>
-            <a:r>
-              <a:rPr lang="en-US" sz="1200" b="1" spc="150" kern="0" dirty="0">
-                <a:solidFill>
-                  <a:srgbClr val="4B5563"/>
-                </a:solidFill>
-                <a:latin typeface="Calibri" pitchFamily="34" charset="0"/>
-                <a:ea typeface="Calibri" pitchFamily="34" charset="-122"/>
-                <a:cs typeface="Calibri" pitchFamily="34" charset="-120"/>
-              </a:rPr>
-              <a:t>IMPACT AND BENEFITS</a:t>
-            </a:r>
-            <a:endParaRPr lang="en-US" sz="1200" dirty="0"/>
-          </a:p>
-        </p:txBody>
+          <p:cNvPr id="2" name="Shape 0"/>
+          <p:cNvSpPr/>
+          <p:nvPr/>
+        </p:nvSpPr>
+        <p:spPr>
+          <a:xfrm>
+            <a:off x="164592" y="109728"/>
+            <a:ext cx="1234440" cy="566928"/>
+          </a:xfrm>
+          <a:prstGeom prst="ellipse">
+            <a:avLst/>
+          </a:prstGeom>
+          <a:solidFill>
+            <a:srgbClr val="FFFFFF"/>
+          </a:solidFill>
+          <a:ln w="15875">
+            <a:solidFill>
+              <a:srgbClr val="7C6BAF"/>
+            </a:solidFill>
+            <a:prstDash val="solid"/>
+          </a:ln>
+        </p:spPr>
       </p:sp>
       <p:sp>
         <p:nvSpPr>
@@ -2508,8 +4459,8 @@
         </p:nvSpPr>
         <p:spPr>
           <a:xfrm>
-            <a:off x="548640" y="603504"/>
-            <a:ext cx="11064240" cy="777240"/>
+            <a:off x="164592" y="109728"/>
+            <a:ext cx="1234440" cy="566928"/>
           </a:xfrm>
           <a:prstGeom prst="rect">
             <a:avLst/>
@@ -2521,21 +4472,21 @@
           <a:bodyPr wrap="square" lIns="0" tIns="0" rIns="0" bIns="0" rtlCol="0" anchor="ctr"/>
           <a:lstStyle/>
           <a:p>
-            <a:pPr indent="0" marL="0">
-              <a:buNone/>
-            </a:pPr>
-            <a:r>
-              <a:rPr lang="en-US" sz="3200" b="1" dirty="0">
-                <a:solidFill>
-                  <a:srgbClr val="111827"/>
-                </a:solidFill>
-                <a:latin typeface="Calibri" pitchFamily="34" charset="0"/>
-                <a:ea typeface="Calibri" pitchFamily="34" charset="-122"/>
-                <a:cs typeface="Calibri" pitchFamily="34" charset="-120"/>
-              </a:rPr>
-              <a:t>Independence, not another helper that never leaves</a:t>
-            </a:r>
-            <a:endParaRPr lang="en-US" sz="3200" dirty="0"/>
+            <a:pPr algn="ctr" indent="0" marL="0">
+              <a:buNone/>
+            </a:pPr>
+            <a:r>
+              <a:rPr lang="en-US" sz="1100" dirty="0">
+                <a:solidFill>
+                  <a:srgbClr val="1A1A1A"/>
+                </a:solidFill>
+                <a:latin typeface="Calibri" pitchFamily="34" charset="0"/>
+                <a:ea typeface="Calibri" pitchFamily="34" charset="-122"/>
+                <a:cs typeface="Calibri" pitchFamily="34" charset="-120"/>
+              </a:rPr>
+              <a:t>Code Blooded</a:t>
+            </a:r>
+            <a:endParaRPr lang="en-US" sz="1100" dirty="0"/>
           </a:p>
         </p:txBody>
       </p:sp>
@@ -2547,8 +4498,8 @@
         </p:nvSpPr>
         <p:spPr>
           <a:xfrm>
-            <a:off x="548640" y="1600200"/>
-            <a:ext cx="5577840" cy="2834640"/>
+            <a:off x="1463040" y="128016"/>
+            <a:ext cx="6126480" cy="530352"/>
           </a:xfrm>
           <a:prstGeom prst="rect">
             <a:avLst/>
@@ -2557,92 +4508,379 @@
           <a:ln/>
         </p:spPr>
         <p:txBody>
+          <a:bodyPr wrap="square" lIns="0" tIns="0" rIns="0" bIns="0" rtlCol="0" anchor="ctr"/>
+          <a:lstStyle/>
+          <a:p>
+            <a:pPr algn="ctr" indent="0" marL="0">
+              <a:buNone/>
+            </a:pPr>
+            <a:r>
+              <a:rPr lang="en-US" sz="2600" b="1" dirty="0">
+                <a:solidFill>
+                  <a:srgbClr val="1F3864"/>
+                </a:solidFill>
+                <a:latin typeface="Cambria" pitchFamily="34" charset="0"/>
+                <a:ea typeface="Cambria" pitchFamily="34" charset="-122"/>
+                <a:cs typeface="Cambria" pitchFamily="34" charset="-120"/>
+              </a:rPr>
+              <a:t>IMPACT AND BENEFITS</a:t>
+            </a:r>
+            <a:endParaRPr lang="en-US" sz="2600" dirty="0"/>
+          </a:p>
+        </p:txBody>
+      </p:sp>
+      <p:sp>
+        <p:nvSpPr>
+          <p:cNvPr id="5" name="Text 3"/>
+          <p:cNvSpPr txBox="1"/>
+          <p:nvPr/>
+        </p:nvSpPr>
+        <p:spPr>
+          <a:xfrm>
+            <a:off x="7699248" y="128016"/>
+            <a:ext cx="1316736" cy="548640"/>
+          </a:xfrm>
+          <a:prstGeom prst="rect">
+            <a:avLst/>
+          </a:prstGeom>
+          <a:noFill/>
+          <a:ln w="9525">
+            <a:solidFill>
+              <a:srgbClr val="DDDDDD"/>
+            </a:solidFill>
+            <a:prstDash val="dash"/>
+          </a:ln>
+        </p:spPr>
+        <p:txBody>
+          <a:bodyPr wrap="square" lIns="0" tIns="0" rIns="0" bIns="0" rtlCol="0" anchor="ctr"/>
+          <a:lstStyle/>
+          <a:p>
+            <a:pPr algn="ctr" indent="0" marL="0">
+              <a:buNone/>
+            </a:pPr>
+            <a:r>
+              <a:rPr lang="en-US" sz="750" i="1" dirty="0">
+                <a:solidFill>
+                  <a:srgbClr val="AAAAAA"/>
+                </a:solidFill>
+                <a:latin typeface="Calibri" pitchFamily="34" charset="0"/>
+                <a:ea typeface="Calibri" pitchFamily="34" charset="-122"/>
+                <a:cs typeface="Calibri" pitchFamily="34" charset="-120"/>
+              </a:rPr>
+              <a:t>SIH 2026 logo</a:t>
+            </a:r>
+            <a:endParaRPr lang="en-US" sz="750" dirty="0"/>
+          </a:p>
+          <a:p>
+            <a:pPr algn="ctr" indent="0" marL="0">
+              <a:buNone/>
+            </a:pPr>
+            <a:r>
+              <a:rPr lang="en-US" sz="750" i="1" dirty="0">
+                <a:solidFill>
+                  <a:srgbClr val="AAAAAA"/>
+                </a:solidFill>
+                <a:latin typeface="Calibri" pitchFamily="34" charset="0"/>
+                <a:ea typeface="Calibri" pitchFamily="34" charset="-122"/>
+                <a:cs typeface="Calibri" pitchFamily="34" charset="-120"/>
+              </a:rPr>
+              <a:t>(from the official template)</a:t>
+            </a:r>
+            <a:endParaRPr lang="en-US" sz="750" dirty="0"/>
+          </a:p>
+        </p:txBody>
+      </p:sp>
+      <p:sp>
+        <p:nvSpPr>
+          <p:cNvPr id="6" name="Shape 4"/>
+          <p:cNvSpPr/>
+          <p:nvPr/>
+        </p:nvSpPr>
+        <p:spPr>
+          <a:xfrm>
+            <a:off x="0" y="4832604"/>
+            <a:ext cx="9144000" cy="310896"/>
+          </a:xfrm>
+          <a:prstGeom prst="rect">
+            <a:avLst/>
+          </a:prstGeom>
+          <a:solidFill>
+            <a:srgbClr val="1F7AC4"/>
+          </a:solidFill>
+          <a:ln/>
+        </p:spPr>
+      </p:sp>
+      <p:sp>
+        <p:nvSpPr>
+          <p:cNvPr id="7" name="Text 5"/>
+          <p:cNvSpPr txBox="1"/>
+          <p:nvPr/>
+        </p:nvSpPr>
+        <p:spPr>
+          <a:xfrm>
+            <a:off x="0" y="4832604"/>
+            <a:ext cx="9144000" cy="310896"/>
+          </a:xfrm>
+          <a:prstGeom prst="rect">
+            <a:avLst/>
+          </a:prstGeom>
+          <a:noFill/>
+          <a:ln/>
+        </p:spPr>
+        <p:txBody>
+          <a:bodyPr wrap="square" lIns="0" tIns="0" rIns="0" bIns="0" rtlCol="0" anchor="ctr"/>
+          <a:lstStyle/>
+          <a:p>
+            <a:pPr algn="ctr" indent="0" marL="0">
+              <a:buNone/>
+            </a:pPr>
+            <a:r>
+              <a:rPr lang="en-US" sz="1000" dirty="0">
+                <a:solidFill>
+                  <a:srgbClr val="FFFFFF"/>
+                </a:solidFill>
+                <a:latin typeface="Calibri" pitchFamily="34" charset="0"/>
+                <a:ea typeface="Calibri" pitchFamily="34" charset="-122"/>
+                <a:cs typeface="Calibri" pitchFamily="34" charset="-120"/>
+              </a:rPr>
+              <a:t>@SIH Idea submission- Template</a:t>
+            </a:r>
+            <a:endParaRPr lang="en-US" sz="1000" dirty="0"/>
+          </a:p>
+        </p:txBody>
+      </p:sp>
+      <p:sp>
+        <p:nvSpPr>
+          <p:cNvPr id="8" name="Text 6"/>
+          <p:cNvSpPr txBox="1"/>
+          <p:nvPr/>
+        </p:nvSpPr>
+        <p:spPr>
+          <a:xfrm>
+            <a:off x="8595360" y="4832604"/>
+            <a:ext cx="365760" cy="310896"/>
+          </a:xfrm>
+          <a:prstGeom prst="rect">
+            <a:avLst/>
+          </a:prstGeom>
+          <a:noFill/>
+          <a:ln/>
+        </p:spPr>
+        <p:txBody>
+          <a:bodyPr wrap="square" lIns="0" tIns="0" rIns="0" bIns="0" rtlCol="0" anchor="ctr"/>
+          <a:lstStyle/>
+          <a:p>
+            <a:pPr algn="r" indent="0" marL="0">
+              <a:buNone/>
+            </a:pPr>
+            <a:r>
+              <a:rPr lang="en-US" sz="1000" b="1" dirty="0">
+                <a:solidFill>
+                  <a:srgbClr val="FFFFFF"/>
+                </a:solidFill>
+                <a:latin typeface="Calibri" pitchFamily="34" charset="0"/>
+                <a:ea typeface="Calibri" pitchFamily="34" charset="-122"/>
+                <a:cs typeface="Calibri" pitchFamily="34" charset="-120"/>
+              </a:rPr>
+              <a:t>5</a:t>
+            </a:r>
+            <a:endParaRPr lang="en-US" sz="1000" dirty="0"/>
+          </a:p>
+        </p:txBody>
+      </p:sp>
+      <p:sp>
+        <p:nvSpPr>
+          <p:cNvPr id="9" name="Shape 7"/>
+          <p:cNvSpPr/>
+          <p:nvPr/>
+        </p:nvSpPr>
+        <p:spPr>
+          <a:xfrm>
+            <a:off x="256032" y="804672"/>
+            <a:ext cx="4206240" cy="1783080"/>
+          </a:xfrm>
+          <a:prstGeom prst="rect">
+            <a:avLst/>
+          </a:prstGeom>
+          <a:solidFill>
+            <a:srgbClr val="FFFFFF"/>
+          </a:solidFill>
+          <a:ln w="12700">
+            <a:solidFill>
+              <a:srgbClr val="4A7EBB"/>
+            </a:solidFill>
+            <a:prstDash val="solid"/>
+          </a:ln>
+        </p:spPr>
+      </p:sp>
+      <p:sp>
+        <p:nvSpPr>
+          <p:cNvPr id="10" name="Text 8"/>
+          <p:cNvSpPr txBox="1"/>
+          <p:nvPr/>
+        </p:nvSpPr>
+        <p:spPr>
+          <a:xfrm>
+            <a:off x="365760" y="868680"/>
+            <a:ext cx="3986784" cy="237744"/>
+          </a:xfrm>
+          <a:prstGeom prst="rect">
+            <a:avLst/>
+          </a:prstGeom>
+          <a:noFill/>
+          <a:ln/>
+        </p:spPr>
+        <p:txBody>
+          <a:bodyPr wrap="square" lIns="0" tIns="0" rIns="0" bIns="0" rtlCol="0" anchor="ctr"/>
+          <a:lstStyle/>
+          <a:p>
+            <a:pPr indent="0" marL="0">
+              <a:buNone/>
+            </a:pPr>
+            <a:r>
+              <a:rPr lang="en-US" sz="1100" b="1" dirty="0">
+                <a:solidFill>
+                  <a:srgbClr val="2E74B5"/>
+                </a:solidFill>
+                <a:latin typeface="Calibri" pitchFamily="34" charset="0"/>
+                <a:ea typeface="Calibri" pitchFamily="34" charset="-122"/>
+                <a:cs typeface="Calibri" pitchFamily="34" charset="-120"/>
+              </a:rPr>
+              <a:t>Potential impact on the target audience</a:t>
+            </a:r>
+            <a:endParaRPr lang="en-US" sz="1100" dirty="0"/>
+          </a:p>
+        </p:txBody>
+      </p:sp>
+      <p:sp>
+        <p:nvSpPr>
+          <p:cNvPr id="11" name="Text 9"/>
+          <p:cNvSpPr txBox="1"/>
+          <p:nvPr/>
+        </p:nvSpPr>
+        <p:spPr>
+          <a:xfrm>
+            <a:off x="384048" y="1115568"/>
+            <a:ext cx="3950208" cy="1380744"/>
+          </a:xfrm>
+          <a:prstGeom prst="rect">
+            <a:avLst/>
+          </a:prstGeom>
+          <a:noFill/>
+          <a:ln/>
+        </p:spPr>
+        <p:txBody>
           <a:bodyPr wrap="square" lIns="0" tIns="0" rIns="0" bIns="0" rtlCol="0" anchor="t"/>
           <a:lstStyle/>
           <a:p>
             <a:pPr marL="342900" indent="-342900">
               <a:lnSpc>
-                <a:spcPts val="2200"/>
+                <a:spcPts val="1300"/>
               </a:lnSpc>
               <a:spcAft>
-                <a:spcPts val="1000"/>
+                <a:spcPts val="500"/>
               </a:spcAft>
               <a:buSzPct val="100000"/>
               <a:buChar char="•"/>
             </a:pPr>
             <a:r>
-              <a:rPr lang="en-US" sz="1500" dirty="0">
-                <a:solidFill>
-                  <a:srgbClr val="111827"/>
-                </a:solidFill>
-                <a:latin typeface="Calibri" pitchFamily="34" charset="0"/>
-                <a:ea typeface="Calibri" pitchFamily="34" charset="-122"/>
-                <a:cs typeface="Calibri" pitchFamily="34" charset="-120"/>
-              </a:rPr>
-              <a:t>Social: the citizen completes the task alone, instead of paying someone else to click for them.</a:t>
-            </a:r>
-            <a:endParaRPr lang="en-US" sz="1500" dirty="0"/>
+              <a:rPr lang="en-US" sz="900" dirty="0">
+                <a:solidFill>
+                  <a:srgbClr val="1A1A1A"/>
+                </a:solidFill>
+                <a:latin typeface="Calibri" pitchFamily="34" charset="0"/>
+                <a:ea typeface="Calibri" pitchFamily="34" charset="-122"/>
+                <a:cs typeface="Calibri" pitchFamily="34" charset="-120"/>
+              </a:rPr>
+              <a:t>Positive - improvement: the citizen completes the task alone instead of paying someone to click.</a:t>
+            </a:r>
+            <a:endParaRPr lang="en-US" sz="900" dirty="0"/>
           </a:p>
           <a:p>
             <a:pPr marL="342900" indent="-342900">
               <a:lnSpc>
-                <a:spcPts val="2200"/>
+                <a:spcPts val="1300"/>
               </a:lnSpc>
               <a:spcAft>
-                <a:spcPts val="1000"/>
+                <a:spcPts val="500"/>
               </a:spcAft>
               <a:buSzPct val="100000"/>
               <a:buChar char="•"/>
             </a:pPr>
             <a:r>
-              <a:rPr lang="en-US" sz="1500" dirty="0">
-                <a:solidFill>
-                  <a:srgbClr val="111827"/>
-                </a:solidFill>
-                <a:latin typeface="Calibri" pitchFamily="34" charset="0"/>
-                <a:ea typeface="Calibri" pitchFamily="34" charset="-122"/>
-                <a:cs typeface="Calibri" pitchFamily="34" charset="-120"/>
-              </a:rPr>
-              <a:t>Educational: guidance fades on demonstrated success - active learning +0.47 SD, spaced retrieval g = 0.74.</a:t>
-            </a:r>
-            <a:endParaRPr lang="en-US" sz="1500" dirty="0"/>
+              <a:rPr lang="en-US" sz="900" dirty="0">
+                <a:solidFill>
+                  <a:srgbClr val="1A1A1A"/>
+                </a:solidFill>
+                <a:latin typeface="Calibri" pitchFamily="34" charset="0"/>
+                <a:ea typeface="Calibri" pitchFamily="34" charset="-122"/>
+                <a:cs typeface="Calibri" pitchFamily="34" charset="-120"/>
+              </a:rPr>
+              <a:t>New opportunities: a teacher or NGO worker walks a task once and it becomes a pack others reuse.</a:t>
+            </a:r>
+            <a:endParaRPr lang="en-US" sz="900" dirty="0"/>
           </a:p>
           <a:p>
             <a:pPr marL="342900" indent="-342900">
               <a:lnSpc>
-                <a:spcPts val="2200"/>
+                <a:spcPts val="1300"/>
               </a:lnSpc>
               <a:spcAft>
-                <a:spcPts val="1000"/>
+                <a:spcPts val="500"/>
               </a:spcAft>
               <a:buSzPct val="100000"/>
               <a:buChar char="•"/>
             </a:pPr>
             <a:r>
-              <a:rPr lang="en-US" sz="1500" dirty="0">
-                <a:solidFill>
-                  <a:srgbClr val="111827"/>
-                </a:solidFill>
-                <a:latin typeface="Calibri" pitchFamily="34" charset="0"/>
-                <a:ea typeface="Calibri" pitchFamily="34" charset="-122"/>
-                <a:cs typeface="Calibri" pitchFamily="34" charset="-120"/>
-              </a:rPr>
-              <a:t>Governance: zero integration cost. It runs on portals that already exist.</a:t>
-            </a:r>
-            <a:endParaRPr lang="en-US" sz="1500" dirty="0"/>
-          </a:p>
-        </p:txBody>
-      </p:sp>
-      <p:sp>
-        <p:nvSpPr>
-          <p:cNvPr id="5" name="Text 3"/>
+              <a:rPr lang="en-US" sz="900" dirty="0">
+                <a:solidFill>
+                  <a:srgbClr val="1A1A1A"/>
+                </a:solidFill>
+                <a:latin typeface="Calibri" pitchFamily="34" charset="0"/>
+                <a:ea typeface="Calibri" pitchFamily="34" charset="-122"/>
+                <a:cs typeface="Calibri" pitchFamily="34" charset="-120"/>
+              </a:rPr>
+              <a:t>Negative - technology adoption: it needs a browser and a first install.</a:t>
+            </a:r>
+            <a:endParaRPr lang="en-US" sz="900" dirty="0"/>
+          </a:p>
+        </p:txBody>
+      </p:sp>
+      <p:sp>
+        <p:nvSpPr>
+          <p:cNvPr id="12" name="Shape 10"/>
+          <p:cNvSpPr/>
+          <p:nvPr/>
+        </p:nvSpPr>
+        <p:spPr>
+          <a:xfrm>
+            <a:off x="4617720" y="804672"/>
+            <a:ext cx="4270248" cy="1783080"/>
+          </a:xfrm>
+          <a:prstGeom prst="rect">
+            <a:avLst/>
+          </a:prstGeom>
+          <a:solidFill>
+            <a:srgbClr val="FFFFFF"/>
+          </a:solidFill>
+          <a:ln w="12700">
+            <a:solidFill>
+              <a:srgbClr val="4A7EBB"/>
+            </a:solidFill>
+            <a:prstDash val="solid"/>
+          </a:ln>
+        </p:spPr>
+      </p:sp>
+      <p:sp>
+        <p:nvSpPr>
+          <p:cNvPr id="13" name="Text 11"/>
           <p:cNvSpPr txBox="1"/>
           <p:nvPr/>
         </p:nvSpPr>
         <p:spPr>
           <a:xfrm>
-            <a:off x="548640" y="4572000"/>
-            <a:ext cx="5577840" cy="457200"/>
+            <a:off x="4727448" y="868680"/>
+            <a:ext cx="4050792" cy="237744"/>
           </a:xfrm>
           <a:prstGeom prst="rect">
             <a:avLst/>
@@ -2658,23 +4896,117 @@
               <a:buNone/>
             </a:pPr>
             <a:r>
-              <a:rPr lang="en-US" sz="1200" i="1" dirty="0">
-                <a:solidFill>
-                  <a:srgbClr val="B42318"/>
-                </a:solidFill>
-                <a:latin typeface="Calibri" pitchFamily="34" charset="0"/>
-                <a:ea typeface="Calibri" pitchFamily="34" charset="-122"/>
-                <a:cs typeface="Calibri" pitchFamily="34" charset="-120"/>
-              </a:rPr>
-              <a:t>Both learning figures validate the mechanism, not our product. Say that out loud.</a:t>
-            </a:r>
-            <a:endParaRPr lang="en-US" sz="1200" dirty="0"/>
+              <a:rPr lang="en-US" sz="1000" b="1" dirty="0">
+                <a:solidFill>
+                  <a:srgbClr val="2E74B5"/>
+                </a:solidFill>
+                <a:latin typeface="Calibri" pitchFamily="34" charset="0"/>
+                <a:ea typeface="Calibri" pitchFamily="34" charset="-122"/>
+                <a:cs typeface="Calibri" pitchFamily="34" charset="-120"/>
+              </a:rPr>
+              <a:t>Benefits of the solution (social, economic, environmental, etc.)</a:t>
+            </a:r>
+            <a:endParaRPr lang="en-US" sz="1000" dirty="0"/>
+          </a:p>
+        </p:txBody>
+      </p:sp>
+      <p:sp>
+        <p:nvSpPr>
+          <p:cNvPr id="14" name="Text 12"/>
+          <p:cNvSpPr txBox="1"/>
+          <p:nvPr/>
+        </p:nvSpPr>
+        <p:spPr>
+          <a:xfrm>
+            <a:off x="4745736" y="1115568"/>
+            <a:ext cx="4014216" cy="1380744"/>
+          </a:xfrm>
+          <a:prstGeom prst="rect">
+            <a:avLst/>
+          </a:prstGeom>
+          <a:noFill/>
+          <a:ln/>
+        </p:spPr>
+        <p:txBody>
+          <a:bodyPr wrap="square" lIns="0" tIns="0" rIns="0" bIns="0" rtlCol="0" anchor="t"/>
+          <a:lstStyle/>
+          <a:p>
+            <a:pPr marL="342900" indent="-342900">
+              <a:lnSpc>
+                <a:spcPts val="1300"/>
+              </a:lnSpc>
+              <a:spcAft>
+                <a:spcPts val="500"/>
+              </a:spcAft>
+              <a:buSzPct val="100000"/>
+              <a:buChar char="•"/>
+            </a:pPr>
+            <a:r>
+              <a:rPr lang="en-US" sz="900" dirty="0">
+                <a:solidFill>
+                  <a:srgbClr val="1A1A1A"/>
+                </a:solidFill>
+                <a:latin typeface="Calibri" pitchFamily="34" charset="0"/>
+                <a:ea typeface="Calibri" pitchFamily="34" charset="-122"/>
+                <a:cs typeface="Calibri" pitchFamily="34" charset="-120"/>
+              </a:rPr>
+              <a:t>Social - improved access, empowerment: independence on services people are already entitled to.</a:t>
+            </a:r>
+            <a:endParaRPr lang="en-US" sz="900" dirty="0"/>
+          </a:p>
+          <a:p>
+            <a:pPr marL="342900" indent="-342900">
+              <a:lnSpc>
+                <a:spcPts val="1300"/>
+              </a:lnSpc>
+              <a:spcAft>
+                <a:spcPts val="500"/>
+              </a:spcAft>
+              <a:buSzPct val="100000"/>
+              <a:buChar char="•"/>
+            </a:pPr>
+            <a:r>
+              <a:rPr lang="en-US" sz="900" dirty="0">
+                <a:solidFill>
+                  <a:srgbClr val="1A1A1A"/>
+                </a:solidFill>
+                <a:latin typeface="Calibri" pitchFamily="34" charset="0"/>
+                <a:ea typeface="Calibri" pitchFamily="34" charset="-122"/>
+                <a:cs typeface="Calibri" pitchFamily="34" charset="-120"/>
+              </a:rPr>
+              <a:t>Economic - cost: avoids the per-visit intermediary and travel documented in the CSC studies.</a:t>
+            </a:r>
+            <a:endParaRPr lang="en-US" sz="900" dirty="0"/>
+          </a:p>
+          <a:p>
+            <a:pPr marL="342900" indent="-342900">
+              <a:lnSpc>
+                <a:spcPts val="1300"/>
+              </a:lnSpc>
+              <a:spcAft>
+                <a:spcPts val="500"/>
+              </a:spcAft>
+              <a:buSzPct val="100000"/>
+              <a:buChar char="•"/>
+            </a:pPr>
+            <a:r>
+              <a:rPr lang="en-US" sz="900" dirty="0">
+                <a:solidFill>
+                  <a:srgbClr val="1A1A1A"/>
+                </a:solidFill>
+                <a:latin typeface="Calibri" pitchFamily="34" charset="0"/>
+                <a:ea typeface="Calibri" pitchFamily="34" charset="-122"/>
+                <a:cs typeface="Calibri" pitchFamily="34" charset="-120"/>
+              </a:rPr>
+              <a:t>Educational: guidance fades on demonstrated success - active learning +0.47 SD, spaced retrieval g = 0.74.</a:t>
+            </a:r>
+            <a:endParaRPr lang="en-US" sz="900" dirty="0"/>
           </a:p>
         </p:txBody>
       </p:sp>
       <p:pic>
         <p:nvPicPr>
-          <p:cNvPr id="6" name="Image 0" descr="F:\SIH\deck\assets\practice-portal.png">    </p:cNvPr>
+          <p:cNvPr id="15" name="Image 0" descr="F:\SIH\deck\assets\practice-portal.png">    </p:cNvPr>
           <p:cNvPicPr>
             <a:picLocks noChangeAspect="1"/>
           </p:cNvPicPr>
@@ -2688,14 +5020,95 @@
         </p:blipFill>
         <p:spPr>
           <a:xfrm>
-            <a:off x="6309360" y="1600200"/>
-            <a:ext cx="5486400" cy="3086100"/>
+            <a:off x="256032" y="2761488"/>
+            <a:ext cx="2926080" cy="1645920"/>
           </a:xfrm>
           <a:prstGeom prst="rect">
             <a:avLst/>
           </a:prstGeom>
         </p:spPr>
       </p:pic>
+      <p:sp>
+        <p:nvSpPr>
+          <p:cNvPr id="16" name="Text 13"/>
+          <p:cNvSpPr txBox="1"/>
+          <p:nvPr/>
+        </p:nvSpPr>
+        <p:spPr>
+          <a:xfrm>
+            <a:off x="3337560" y="2798064"/>
+            <a:ext cx="5550408" cy="914400"/>
+          </a:xfrm>
+          <a:prstGeom prst="rect">
+            <a:avLst/>
+          </a:prstGeom>
+          <a:noFill/>
+          <a:ln/>
+        </p:spPr>
+        <p:txBody>
+          <a:bodyPr wrap="square" lIns="0" tIns="0" rIns="0" bIns="0" rtlCol="0" anchor="ctr"/>
+          <a:lstStyle/>
+          <a:p>
+            <a:pPr indent="0" marL="0">
+              <a:lnSpc>
+                <a:spcPts val="1100"/>
+              </a:lnSpc>
+              <a:buNone/>
+            </a:pPr>
+            <a:r>
+              <a:rPr lang="en-US" sz="850" dirty="0">
+                <a:solidFill>
+                  <a:srgbClr val="1A1A1A"/>
+                </a:solidFill>
+                <a:latin typeface="Calibri" pitchFamily="34" charset="0"/>
+                <a:ea typeface="Calibri" pitchFamily="34" charset="-122"/>
+                <a:cs typeface="Calibri" pitchFamily="34" charset="-120"/>
+              </a:rPr>
+              <a:t>Only 11.4% of connected households use the internet for government services, and one in five households using digital services depends on help from outside the household (NCAER, June 2026). A Maharashtra study recorded Rs 47 in service charges plus travel; a Jharkhand study recorded Rs 101 actually paid against a Rs 30 official fee.</a:t>
+            </a:r>
+            <a:endParaRPr lang="en-US" sz="850" dirty="0"/>
+          </a:p>
+        </p:txBody>
+      </p:sp>
+      <p:sp>
+        <p:nvSpPr>
+          <p:cNvPr id="17" name="Text 14"/>
+          <p:cNvSpPr txBox="1"/>
+          <p:nvPr/>
+        </p:nvSpPr>
+        <p:spPr>
+          <a:xfrm>
+            <a:off x="3337560" y="3794760"/>
+            <a:ext cx="5550408" cy="365760"/>
+          </a:xfrm>
+          <a:prstGeom prst="rect">
+            <a:avLst/>
+          </a:prstGeom>
+          <a:noFill/>
+          <a:ln/>
+        </p:spPr>
+        <p:txBody>
+          <a:bodyPr wrap="square" lIns="0" tIns="0" rIns="0" bIns="0" rtlCol="0" anchor="ctr"/>
+          <a:lstStyle/>
+          <a:p>
+            <a:pPr indent="0" marL="0">
+              <a:buNone/>
+            </a:pPr>
+            <a:r>
+              <a:rPr lang="en-US" sz="850" i="1" dirty="0">
+                <a:solidFill>
+                  <a:srgbClr val="B42318"/>
+                </a:solidFill>
+                <a:latin typeface="Calibri" pitchFamily="34" charset="0"/>
+                <a:ea typeface="Calibri" pitchFamily="34" charset="-122"/>
+                <a:cs typeface="Calibri" pitchFamily="34" charset="-120"/>
+              </a:rPr>
+              <a:t>Both learning figures validate the mechanism, not our product. Say that out loud.</a:t>
+            </a:r>
+            <a:endParaRPr lang="en-US" sz="850" dirty="0"/>
+          </a:p>
+        </p:txBody>
+      </p:sp>
     </p:spTree>
   </p:cSld>
   <p:clrMapOvr>
@@ -2723,42 +5136,28 @@
       </p:grpSpPr>
       <p:sp>
         <p:nvSpPr>
-          <p:cNvPr id="2" name="Text 0"/>
-          <p:cNvSpPr txBox="1"/>
-          <p:nvPr/>
-        </p:nvSpPr>
-        <p:spPr>
-          <a:xfrm>
-            <a:off x="548640" y="320040"/>
-            <a:ext cx="11064240" cy="274320"/>
-          </a:xfrm>
-          <a:prstGeom prst="rect">
-            <a:avLst/>
-          </a:prstGeom>
-          <a:noFill/>
-          <a:ln/>
-        </p:spPr>
-        <p:txBody>
-          <a:bodyPr wrap="square" lIns="0" tIns="0" rIns="0" bIns="0" rtlCol="0" anchor="ctr"/>
-          <a:lstStyle/>
-          <a:p>
-            <a:pPr indent="0" marL="0">
-              <a:buNone/>
-            </a:pPr>
-            <a:r>
-              <a:rPr lang="en-US" sz="1200" b="1" spc="150" kern="0" dirty="0">
-                <a:solidFill>
-                  <a:srgbClr val="4B5563"/>
-                </a:solidFill>
-                <a:latin typeface="Calibri" pitchFamily="34" charset="0"/>
-                <a:ea typeface="Calibri" pitchFamily="34" charset="-122"/>
-                <a:cs typeface="Calibri" pitchFamily="34" charset="-120"/>
-              </a:rPr>
-              <a:t>RESEARCH AND REFERENCES</a:t>
-            </a:r>
-            <a:endParaRPr lang="en-US" sz="1200" dirty="0"/>
-          </a:p>
-        </p:txBody>
+          <p:cNvPr id="2" name="Shape 0"/>
+          <p:cNvSpPr/>
+          <p:nvPr/>
+        </p:nvSpPr>
+        <p:spPr>
+          <a:xfrm>
+            <a:off x="164592" y="109728"/>
+            <a:ext cx="1234440" cy="566928"/>
+          </a:xfrm>
+          <a:prstGeom prst="ellipse">
+            <a:avLst/>
+          </a:prstGeom>
+          <a:solidFill>
+            <a:srgbClr val="FFFFFF"/>
+          </a:solidFill>
+          <a:ln w="15875">
+            <a:solidFill>
+              <a:srgbClr val="7C6BAF"/>
+            </a:solidFill>
+            <a:prstDash val="solid"/>
+          </a:ln>
+        </p:spPr>
       </p:sp>
       <p:sp>
         <p:nvSpPr>
@@ -2768,8 +5167,8 @@
         </p:nvSpPr>
         <p:spPr>
           <a:xfrm>
-            <a:off x="548640" y="603504"/>
-            <a:ext cx="11064240" cy="777240"/>
+            <a:off x="164592" y="109728"/>
+            <a:ext cx="1234440" cy="566928"/>
           </a:xfrm>
           <a:prstGeom prst="rect">
             <a:avLst/>
@@ -2781,21 +5180,21 @@
           <a:bodyPr wrap="square" lIns="0" tIns="0" rIns="0" bIns="0" rtlCol="0" anchor="ctr"/>
           <a:lstStyle/>
           <a:p>
-            <a:pPr indent="0" marL="0">
-              <a:buNone/>
-            </a:pPr>
-            <a:r>
-              <a:rPr lang="en-US" sz="3200" b="1" dirty="0">
-                <a:solidFill>
-                  <a:srgbClr val="111827"/>
-                </a:solidFill>
-                <a:latin typeface="Calibri" pitchFamily="34" charset="0"/>
-                <a:ea typeface="Calibri" pitchFamily="34" charset="-122"/>
-                <a:cs typeface="Calibri" pitchFamily="34" charset="-120"/>
-              </a:rPr>
-              <a:t>What we read before building</a:t>
-            </a:r>
-            <a:endParaRPr lang="en-US" sz="3200" dirty="0"/>
+            <a:pPr algn="ctr" indent="0" marL="0">
+              <a:buNone/>
+            </a:pPr>
+            <a:r>
+              <a:rPr lang="en-US" sz="1100" dirty="0">
+                <a:solidFill>
+                  <a:srgbClr val="1A1A1A"/>
+                </a:solidFill>
+                <a:latin typeface="Calibri" pitchFamily="34" charset="0"/>
+                <a:ea typeface="Calibri" pitchFamily="34" charset="-122"/>
+                <a:cs typeface="Calibri" pitchFamily="34" charset="-120"/>
+              </a:rPr>
+              <a:t>Code Blooded</a:t>
+            </a:r>
+            <a:endParaRPr lang="en-US" sz="1100" dirty="0"/>
           </a:p>
         </p:txBody>
       </p:sp>
@@ -2807,8 +5206,8 @@
         </p:nvSpPr>
         <p:spPr>
           <a:xfrm>
-            <a:off x="548640" y="1600200"/>
-            <a:ext cx="5394960" cy="4206240"/>
+            <a:off x="1463040" y="128016"/>
+            <a:ext cx="6126480" cy="530352"/>
           </a:xfrm>
           <a:prstGeom prst="rect">
             <a:avLst/>
@@ -2817,23 +5216,260 @@
           <a:ln/>
         </p:spPr>
         <p:txBody>
+          <a:bodyPr wrap="square" lIns="0" tIns="0" rIns="0" bIns="0" rtlCol="0" anchor="ctr"/>
+          <a:lstStyle/>
+          <a:p>
+            <a:pPr algn="ctr" indent="0" marL="0">
+              <a:buNone/>
+            </a:pPr>
+            <a:r>
+              <a:rPr lang="en-US" sz="2600" b="1" dirty="0">
+                <a:solidFill>
+                  <a:srgbClr val="1F3864"/>
+                </a:solidFill>
+                <a:latin typeface="Cambria" pitchFamily="34" charset="0"/>
+                <a:ea typeface="Cambria" pitchFamily="34" charset="-122"/>
+                <a:cs typeface="Cambria" pitchFamily="34" charset="-120"/>
+              </a:rPr>
+              <a:t>RESEARCH AND REFERENCES</a:t>
+            </a:r>
+            <a:endParaRPr lang="en-US" sz="2600" dirty="0"/>
+          </a:p>
+        </p:txBody>
+      </p:sp>
+      <p:sp>
+        <p:nvSpPr>
+          <p:cNvPr id="5" name="Text 3"/>
+          <p:cNvSpPr txBox="1"/>
+          <p:nvPr/>
+        </p:nvSpPr>
+        <p:spPr>
+          <a:xfrm>
+            <a:off x="7699248" y="128016"/>
+            <a:ext cx="1316736" cy="548640"/>
+          </a:xfrm>
+          <a:prstGeom prst="rect">
+            <a:avLst/>
+          </a:prstGeom>
+          <a:noFill/>
+          <a:ln w="9525">
+            <a:solidFill>
+              <a:srgbClr val="DDDDDD"/>
+            </a:solidFill>
+            <a:prstDash val="dash"/>
+          </a:ln>
+        </p:spPr>
+        <p:txBody>
+          <a:bodyPr wrap="square" lIns="0" tIns="0" rIns="0" bIns="0" rtlCol="0" anchor="ctr"/>
+          <a:lstStyle/>
+          <a:p>
+            <a:pPr algn="ctr" indent="0" marL="0">
+              <a:buNone/>
+            </a:pPr>
+            <a:r>
+              <a:rPr lang="en-US" sz="750" i="1" dirty="0">
+                <a:solidFill>
+                  <a:srgbClr val="AAAAAA"/>
+                </a:solidFill>
+                <a:latin typeface="Calibri" pitchFamily="34" charset="0"/>
+                <a:ea typeface="Calibri" pitchFamily="34" charset="-122"/>
+                <a:cs typeface="Calibri" pitchFamily="34" charset="-120"/>
+              </a:rPr>
+              <a:t>SIH 2026 logo</a:t>
+            </a:r>
+            <a:endParaRPr lang="en-US" sz="750" dirty="0"/>
+          </a:p>
+          <a:p>
+            <a:pPr algn="ctr" indent="0" marL="0">
+              <a:buNone/>
+            </a:pPr>
+            <a:r>
+              <a:rPr lang="en-US" sz="750" i="1" dirty="0">
+                <a:solidFill>
+                  <a:srgbClr val="AAAAAA"/>
+                </a:solidFill>
+                <a:latin typeface="Calibri" pitchFamily="34" charset="0"/>
+                <a:ea typeface="Calibri" pitchFamily="34" charset="-122"/>
+                <a:cs typeface="Calibri" pitchFamily="34" charset="-120"/>
+              </a:rPr>
+              <a:t>(from the official template)</a:t>
+            </a:r>
+            <a:endParaRPr lang="en-US" sz="750" dirty="0"/>
+          </a:p>
+        </p:txBody>
+      </p:sp>
+      <p:sp>
+        <p:nvSpPr>
+          <p:cNvPr id="6" name="Shape 4"/>
+          <p:cNvSpPr/>
+          <p:nvPr/>
+        </p:nvSpPr>
+        <p:spPr>
+          <a:xfrm>
+            <a:off x="0" y="4832604"/>
+            <a:ext cx="9144000" cy="310896"/>
+          </a:xfrm>
+          <a:prstGeom prst="rect">
+            <a:avLst/>
+          </a:prstGeom>
+          <a:solidFill>
+            <a:srgbClr val="1F7AC4"/>
+          </a:solidFill>
+          <a:ln/>
+        </p:spPr>
+      </p:sp>
+      <p:sp>
+        <p:nvSpPr>
+          <p:cNvPr id="7" name="Text 5"/>
+          <p:cNvSpPr txBox="1"/>
+          <p:nvPr/>
+        </p:nvSpPr>
+        <p:spPr>
+          <a:xfrm>
+            <a:off x="0" y="4832604"/>
+            <a:ext cx="9144000" cy="310896"/>
+          </a:xfrm>
+          <a:prstGeom prst="rect">
+            <a:avLst/>
+          </a:prstGeom>
+          <a:noFill/>
+          <a:ln/>
+        </p:spPr>
+        <p:txBody>
+          <a:bodyPr wrap="square" lIns="0" tIns="0" rIns="0" bIns="0" rtlCol="0" anchor="ctr"/>
+          <a:lstStyle/>
+          <a:p>
+            <a:pPr algn="ctr" indent="0" marL="0">
+              <a:buNone/>
+            </a:pPr>
+            <a:r>
+              <a:rPr lang="en-US" sz="1000" dirty="0">
+                <a:solidFill>
+                  <a:srgbClr val="FFFFFF"/>
+                </a:solidFill>
+                <a:latin typeface="Calibri" pitchFamily="34" charset="0"/>
+                <a:ea typeface="Calibri" pitchFamily="34" charset="-122"/>
+                <a:cs typeface="Calibri" pitchFamily="34" charset="-120"/>
+              </a:rPr>
+              <a:t>@SIH Idea submission- Template</a:t>
+            </a:r>
+            <a:endParaRPr lang="en-US" sz="1000" dirty="0"/>
+          </a:p>
+        </p:txBody>
+      </p:sp>
+      <p:sp>
+        <p:nvSpPr>
+          <p:cNvPr id="8" name="Text 6"/>
+          <p:cNvSpPr txBox="1"/>
+          <p:nvPr/>
+        </p:nvSpPr>
+        <p:spPr>
+          <a:xfrm>
+            <a:off x="8595360" y="4832604"/>
+            <a:ext cx="365760" cy="310896"/>
+          </a:xfrm>
+          <a:prstGeom prst="rect">
+            <a:avLst/>
+          </a:prstGeom>
+          <a:noFill/>
+          <a:ln/>
+        </p:spPr>
+        <p:txBody>
+          <a:bodyPr wrap="square" lIns="0" tIns="0" rIns="0" bIns="0" rtlCol="0" anchor="ctr"/>
+          <a:lstStyle/>
+          <a:p>
+            <a:pPr algn="r" indent="0" marL="0">
+              <a:buNone/>
+            </a:pPr>
+            <a:r>
+              <a:rPr lang="en-US" sz="1000" b="1" dirty="0">
+                <a:solidFill>
+                  <a:srgbClr val="FFFFFF"/>
+                </a:solidFill>
+                <a:latin typeface="Calibri" pitchFamily="34" charset="0"/>
+                <a:ea typeface="Calibri" pitchFamily="34" charset="-122"/>
+                <a:cs typeface="Calibri" pitchFamily="34" charset="-120"/>
+              </a:rPr>
+              <a:t>6</a:t>
+            </a:r>
+            <a:endParaRPr lang="en-US" sz="1000" dirty="0"/>
+          </a:p>
+        </p:txBody>
+      </p:sp>
+      <p:sp>
+        <p:nvSpPr>
+          <p:cNvPr id="9" name="Text 7"/>
+          <p:cNvSpPr txBox="1"/>
+          <p:nvPr/>
+        </p:nvSpPr>
+        <p:spPr>
+          <a:xfrm>
+            <a:off x="320040" y="804672"/>
+            <a:ext cx="8503920" cy="256032"/>
+          </a:xfrm>
+          <a:prstGeom prst="rect">
+            <a:avLst/>
+          </a:prstGeom>
+          <a:noFill/>
+          <a:ln/>
+        </p:spPr>
+        <p:txBody>
+          <a:bodyPr wrap="square" lIns="0" tIns="0" rIns="0" bIns="0" rtlCol="0" anchor="ctr"/>
+          <a:lstStyle/>
+          <a:p>
+            <a:pPr indent="0" marL="0">
+              <a:buNone/>
+            </a:pPr>
+            <a:r>
+              <a:rPr lang="en-US" sz="1150" b="1" dirty="0">
+                <a:solidFill>
+                  <a:srgbClr val="2E74B5"/>
+                </a:solidFill>
+                <a:latin typeface="Calibri" pitchFamily="34" charset="0"/>
+                <a:ea typeface="Calibri" pitchFamily="34" charset="-122"/>
+                <a:cs typeface="Calibri" pitchFamily="34" charset="-120"/>
+              </a:rPr>
+              <a:t>Details / Links of the reference and research work</a:t>
+            </a:r>
+            <a:endParaRPr lang="en-US" sz="1150" dirty="0"/>
+          </a:p>
+        </p:txBody>
+      </p:sp>
+      <p:sp>
+        <p:nvSpPr>
+          <p:cNvPr id="10" name="Text 8"/>
+          <p:cNvSpPr txBox="1"/>
+          <p:nvPr/>
+        </p:nvSpPr>
+        <p:spPr>
+          <a:xfrm>
+            <a:off x="320040" y="1188720"/>
+            <a:ext cx="4160520" cy="3108960"/>
+          </a:xfrm>
+          <a:prstGeom prst="rect">
+            <a:avLst/>
+          </a:prstGeom>
+          <a:noFill/>
+          <a:ln/>
+        </p:spPr>
+        <p:txBody>
           <a:bodyPr wrap="square" lIns="0" tIns="0" rIns="0" bIns="0" rtlCol="0" anchor="t"/>
           <a:lstStyle/>
           <a:p>
             <a:pPr marL="342900" indent="-342900">
               <a:lnSpc>
-                <a:spcPts val="2200"/>
+                <a:spcPts val="1300"/>
               </a:lnSpc>
               <a:spcAft>
-                <a:spcPts val="1000"/>
+                <a:spcPts val="700"/>
               </a:spcAft>
               <a:buSzPct val="100000"/>
               <a:buChar char="•"/>
             </a:pPr>
             <a:r>
-              <a:rPr lang="en-US" sz="1400" dirty="0">
-                <a:solidFill>
-                  <a:srgbClr val="111827"/>
+              <a:rPr lang="en-US" sz="950" dirty="0">
+                <a:solidFill>
+                  <a:srgbClr val="1A1A1A"/>
                 </a:solidFill>
                 <a:latin typeface="Calibri" pitchFamily="34" charset="0"/>
                 <a:ea typeface="Calibri" pitchFamily="34" charset="-122"/>
@@ -2841,23 +5477,23 @@
               </a:rPr>
               <a:t>MoSPI, Comprehensive Annual Modular Survey 2022-23 - the 21% combined ICT-skill figure.</a:t>
             </a:r>
-            <a:endParaRPr lang="en-US" sz="1400" dirty="0"/>
+            <a:endParaRPr lang="en-US" sz="950" dirty="0"/>
           </a:p>
           <a:p>
             <a:pPr marL="342900" indent="-342900">
               <a:lnSpc>
-                <a:spcPts val="2200"/>
+                <a:spcPts val="1300"/>
               </a:lnSpc>
               <a:spcAft>
-                <a:spcPts val="1000"/>
+                <a:spcPts val="700"/>
               </a:spcAft>
               <a:buSzPct val="100000"/>
               <a:buChar char="•"/>
             </a:pPr>
             <a:r>
-              <a:rPr lang="en-US" sz="1400" dirty="0">
-                <a:solidFill>
-                  <a:srgbClr val="111827"/>
+              <a:rPr lang="en-US" sz="950" dirty="0">
+                <a:solidFill>
+                  <a:srgbClr val="1A1A1A"/>
                 </a:solidFill>
                 <a:latin typeface="Calibri" pitchFamily="34" charset="0"/>
                 <a:ea typeface="Calibri" pitchFamily="34" charset="-122"/>
@@ -2865,23 +5501,23 @@
               </a:rPr>
               <a:t>NSS 78th Round (2020-21) - computer literacy 24.7% national, 18.1% rural.</a:t>
             </a:r>
-            <a:endParaRPr lang="en-US" sz="1400" dirty="0"/>
+            <a:endParaRPr lang="en-US" sz="950" dirty="0"/>
           </a:p>
           <a:p>
             <a:pPr marL="342900" indent="-342900">
               <a:lnSpc>
-                <a:spcPts val="2200"/>
+                <a:spcPts val="1300"/>
               </a:lnSpc>
               <a:spcAft>
-                <a:spcPts val="1000"/>
+                <a:spcPts val="700"/>
               </a:spcAft>
               <a:buSzPct val="100000"/>
               <a:buChar char="•"/>
             </a:pPr>
             <a:r>
-              <a:rPr lang="en-US" sz="1400" dirty="0">
-                <a:solidFill>
-                  <a:srgbClr val="111827"/>
+              <a:rPr lang="en-US" sz="950" dirty="0">
+                <a:solidFill>
+                  <a:srgbClr val="1A1A1A"/>
                 </a:solidFill>
                 <a:latin typeface="Calibri" pitchFamily="34" charset="0"/>
                 <a:ea typeface="Calibri" pitchFamily="34" charset="-122"/>
@@ -2889,23 +5525,23 @@
               </a:rPr>
               <a:t>NCAER, The Evolving Landscape of Digital Inclusion in India, June 2026.</a:t>
             </a:r>
-            <a:endParaRPr lang="en-US" sz="1400" dirty="0"/>
+            <a:endParaRPr lang="en-US" sz="950" dirty="0"/>
           </a:p>
           <a:p>
             <a:pPr marL="342900" indent="-342900">
               <a:lnSpc>
-                <a:spcPts val="2200"/>
+                <a:spcPts val="1300"/>
               </a:lnSpc>
               <a:spcAft>
-                <a:spcPts val="1000"/>
+                <a:spcPts val="700"/>
               </a:spcAft>
               <a:buSzPct val="100000"/>
               <a:buChar char="•"/>
             </a:pPr>
             <a:r>
-              <a:rPr lang="en-US" sz="1400" dirty="0">
-                <a:solidFill>
-                  <a:srgbClr val="111827"/>
+              <a:rPr lang="en-US" sz="950" dirty="0">
+                <a:solidFill>
+                  <a:srgbClr val="1A1A1A"/>
                 </a:solidFill>
                 <a:latin typeface="Calibri" pitchFamily="34" charset="0"/>
                 <a:ea typeface="Calibri" pitchFamily="34" charset="-122"/>
@@ -2913,23 +5549,23 @@
               </a:rPr>
               <a:t>PIB / MeitY - CSC network: 48.54 crore transactions, 5,01,731 centres, FY 2025-26.</a:t>
             </a:r>
-            <a:endParaRPr lang="en-US" sz="1400" dirty="0"/>
+            <a:endParaRPr lang="en-US" sz="950" dirty="0"/>
           </a:p>
           <a:p>
             <a:pPr marL="342900" indent="-342900">
               <a:lnSpc>
-                <a:spcPts val="2200"/>
+                <a:spcPts val="1300"/>
               </a:lnSpc>
               <a:spcAft>
-                <a:spcPts val="1000"/>
+                <a:spcPts val="700"/>
               </a:spcAft>
               <a:buSzPct val="100000"/>
               <a:buChar char="•"/>
             </a:pPr>
             <a:r>
-              <a:rPr lang="en-US" sz="1400" dirty="0">
-                <a:solidFill>
-                  <a:srgbClr val="111827"/>
+              <a:rPr lang="en-US" sz="950" dirty="0">
+                <a:solidFill>
+                  <a:srgbClr val="1A1A1A"/>
                 </a:solidFill>
                 <a:latin typeface="Calibri" pitchFamily="34" charset="0"/>
                 <a:ea typeface="Calibri" pitchFamily="34" charset="-122"/>
@@ -2937,20 +5573,20 @@
               </a:rPr>
               <a:t>Freeman et al., PNAS 2014 - active learning, +0.47 SD across 225 studies.</a:t>
             </a:r>
-            <a:endParaRPr lang="en-US" sz="1400" dirty="0"/>
-          </a:p>
-        </p:txBody>
-      </p:sp>
-      <p:sp>
-        <p:nvSpPr>
-          <p:cNvPr id="5" name="Text 3"/>
+            <a:endParaRPr lang="en-US" sz="950" dirty="0"/>
+          </a:p>
+        </p:txBody>
+      </p:sp>
+      <p:sp>
+        <p:nvSpPr>
+          <p:cNvPr id="11" name="Text 9"/>
           <p:cNvSpPr txBox="1"/>
           <p:nvPr/>
         </p:nvSpPr>
         <p:spPr>
           <a:xfrm>
-            <a:off x="6217920" y="1600200"/>
-            <a:ext cx="5394960" cy="4206240"/>
+            <a:off x="4663440" y="1188720"/>
+            <a:ext cx="4160520" cy="3108960"/>
           </a:xfrm>
           <a:prstGeom prst="rect">
             <a:avLst/>
@@ -2964,18 +5600,18 @@
           <a:p>
             <a:pPr marL="342900" indent="-342900">
               <a:lnSpc>
-                <a:spcPts val="2200"/>
+                <a:spcPts val="1300"/>
               </a:lnSpc>
               <a:spcAft>
-                <a:spcPts val="1000"/>
+                <a:spcPts val="700"/>
               </a:spcAft>
               <a:buSzPct val="100000"/>
               <a:buChar char="•"/>
             </a:pPr>
             <a:r>
-              <a:rPr lang="en-US" sz="1400" dirty="0">
-                <a:solidFill>
-                  <a:srgbClr val="111827"/>
+              <a:rPr lang="en-US" sz="950" dirty="0">
+                <a:solidFill>
+                  <a:srgbClr val="1A1A1A"/>
                 </a:solidFill>
                 <a:latin typeface="Calibri" pitchFamily="34" charset="0"/>
                 <a:ea typeface="Calibri" pitchFamily="34" charset="-122"/>
@@ -2983,23 +5619,23 @@
               </a:rPr>
               <a:t>Adesope et al. 2017 (retrieval, g = 0.51); Latimier et al. 2021 (spacing, g = 0.74).</a:t>
             </a:r>
-            <a:endParaRPr lang="en-US" sz="1400" dirty="0"/>
+            <a:endParaRPr lang="en-US" sz="950" dirty="0"/>
           </a:p>
           <a:p>
             <a:pPr marL="342900" indent="-342900">
               <a:lnSpc>
-                <a:spcPts val="2200"/>
+                <a:spcPts val="1300"/>
               </a:lnSpc>
               <a:spcAft>
-                <a:spcPts val="1000"/>
+                <a:spcPts val="700"/>
               </a:spcAft>
               <a:buSzPct val="100000"/>
               <a:buChar char="•"/>
             </a:pPr>
             <a:r>
-              <a:rPr lang="en-US" sz="1400" dirty="0">
-                <a:solidFill>
-                  <a:srgbClr val="111827"/>
+              <a:rPr lang="en-US" sz="950" dirty="0">
+                <a:solidFill>
+                  <a:srgbClr val="1A1A1A"/>
                 </a:solidFill>
                 <a:latin typeface="Calibri" pitchFamily="34" charset="0"/>
                 <a:ea typeface="Calibri" pitchFamily="34" charset="-122"/>
@@ -3007,23 +5643,23 @@
               </a:rPr>
               <a:t>Renkl et al. - guidance fading triggered by mastery evidence, not elapsed time.</a:t>
             </a:r>
-            <a:endParaRPr lang="en-US" sz="1400" dirty="0"/>
+            <a:endParaRPr lang="en-US" sz="950" dirty="0"/>
           </a:p>
           <a:p>
             <a:pPr marL="342900" indent="-342900">
               <a:lnSpc>
-                <a:spcPts val="2200"/>
+                <a:spcPts val="1300"/>
               </a:lnSpc>
               <a:spcAft>
-                <a:spcPts val="1000"/>
+                <a:spcPts val="700"/>
               </a:spcAft>
               <a:buSzPct val="100000"/>
               <a:buChar char="•"/>
             </a:pPr>
             <a:r>
-              <a:rPr lang="en-US" sz="1400" dirty="0">
-                <a:solidFill>
-                  <a:srgbClr val="111827"/>
+              <a:rPr lang="en-US" sz="950" dirty="0">
+                <a:solidFill>
+                  <a:srgbClr val="1A1A1A"/>
                 </a:solidFill>
                 <a:latin typeface="Calibri" pitchFamily="34" charset="0"/>
                 <a:ea typeface="Calibri" pitchFamily="34" charset="-122"/>
@@ -3031,23 +5667,23 @@
               </a:rPr>
               <a:t>Microsoft Copilot Vision release notes - the closest shipped prior art.</a:t>
             </a:r>
-            <a:endParaRPr lang="en-US" sz="1400" dirty="0"/>
+            <a:endParaRPr lang="en-US" sz="950" dirty="0"/>
           </a:p>
           <a:p>
             <a:pPr marL="342900" indent="-342900">
               <a:lnSpc>
-                <a:spcPts val="2200"/>
+                <a:spcPts val="1300"/>
               </a:lnSpc>
               <a:spcAft>
-                <a:spcPts val="1000"/>
+                <a:spcPts val="700"/>
               </a:spcAft>
               <a:buSzPct val="100000"/>
               <a:buChar char="•"/>
             </a:pPr>
             <a:r>
-              <a:rPr lang="en-US" sz="1400" dirty="0">
-                <a:solidFill>
-                  <a:srgbClr val="111827"/>
+              <a:rPr lang="en-US" sz="950" dirty="0">
+                <a:solidFill>
+                  <a:srgbClr val="1A1A1A"/>
                 </a:solidFill>
                 <a:latin typeface="Calibri" pitchFamily="34" charset="0"/>
                 <a:ea typeface="Calibri" pitchFamily="34" charset="-122"/>
@@ -3055,23 +5691,23 @@
               </a:rPr>
               <a:t>IAMAI-Kantar, Internet in India 2024; BHASHINI metrics dashboard.</a:t>
             </a:r>
-            <a:endParaRPr lang="en-US" sz="1400" dirty="0"/>
+            <a:endParaRPr lang="en-US" sz="950" dirty="0"/>
           </a:p>
           <a:p>
             <a:pPr marL="342900" indent="-342900">
               <a:lnSpc>
-                <a:spcPts val="2200"/>
+                <a:spcPts val="1300"/>
               </a:lnSpc>
               <a:spcAft>
-                <a:spcPts val="1000"/>
+                <a:spcPts val="700"/>
               </a:spcAft>
               <a:buSzPct val="100000"/>
               <a:buChar char="•"/>
             </a:pPr>
             <a:r>
-              <a:rPr lang="en-US" sz="1400" dirty="0">
-                <a:solidFill>
-                  <a:srgbClr val="111827"/>
+              <a:rPr lang="en-US" sz="950" dirty="0">
+                <a:solidFill>
+                  <a:srgbClr val="1A1A1A"/>
                 </a:solidFill>
                 <a:latin typeface="Calibri" pitchFamily="34" charset="0"/>
                 <a:ea typeface="Calibri" pitchFamily="34" charset="-122"/>
@@ -3079,20 +5715,20 @@
               </a:rPr>
               <a:t>microsoft/GUI-Actor (MIT) - the vision-grounding fallback on our roadmap.</a:t>
             </a:r>
-            <a:endParaRPr lang="en-US" sz="1400" dirty="0"/>
-          </a:p>
-        </p:txBody>
-      </p:sp>
-      <p:sp>
-        <p:nvSpPr>
-          <p:cNvPr id="6" name="Text 4"/>
+            <a:endParaRPr lang="en-US" sz="950" dirty="0"/>
+          </a:p>
+        </p:txBody>
+      </p:sp>
+      <p:sp>
+        <p:nvSpPr>
+          <p:cNvPr id="12" name="Text 10"/>
           <p:cNvSpPr txBox="1"/>
           <p:nvPr/>
         </p:nvSpPr>
         <p:spPr>
           <a:xfrm>
-            <a:off x="548640" y="5943600"/>
-            <a:ext cx="11064240" cy="685800"/>
+            <a:off x="320040" y="4343400"/>
+            <a:ext cx="8503920" cy="320040"/>
           </a:xfrm>
           <a:prstGeom prst="rect">
             <a:avLst/>
@@ -3105,23 +5741,20 @@
           <a:lstStyle/>
           <a:p>
             <a:pPr indent="0" marL="0">
-              <a:lnSpc>
-                <a:spcPts val="1600"/>
-              </a:lnSpc>
-              <a:buNone/>
-            </a:pPr>
-            <a:r>
-              <a:rPr lang="en-US" sz="1150" i="1" dirty="0">
-                <a:solidFill>
-                  <a:srgbClr val="4B5563"/>
-                </a:solidFill>
-                <a:latin typeface="Calibri" pitchFamily="34" charset="0"/>
-                <a:ea typeface="Calibri" pitchFamily="34" charset="-122"/>
-                <a:cs typeface="Calibri" pitchFamily="34" charset="-120"/>
-              </a:rPr>
-              <a:t>Every figure on this deck is traced to a source line in deck/numbers.md.</a:t>
-            </a:r>
-            <a:endParaRPr lang="en-US" sz="1150" dirty="0"/>
+              <a:buNone/>
+            </a:pPr>
+            <a:r>
+              <a:rPr lang="en-US" sz="900" i="1" dirty="0">
+                <a:solidFill>
+                  <a:srgbClr val="595959"/>
+                </a:solidFill>
+                <a:latin typeface="Calibri" pitchFamily="34" charset="0"/>
+                <a:ea typeface="Calibri" pitchFamily="34" charset="-122"/>
+                <a:cs typeface="Calibri" pitchFamily="34" charset="-120"/>
+              </a:rPr>
+              <a:t>Every figure on this deck is traced to an exact source line in deck/numbers.md.</a:t>
+            </a:r>
+            <a:endParaRPr lang="en-US" sz="900" dirty="0"/>
           </a:p>
         </p:txBody>
       </p:sp>
